--- a/curso/pptx/S81.pptx
+++ b/curso/pptx/S81.pptx
@@ -4242,7 +4242,7 @@
                 </a:solidFill>
                 <a:latin typeface="Nunito Sans"/>
               </a:rPr>
-              <a:t>Iker ve la lista del equipo de robótica del instituto y dice: «¿Una chica? Las chicas no valen para la tecnología».</a:t>
+              <a:t>Un chico ve la lista del equipo de robótica del instituto y dice: «¿Una chica? Las chicas no valen para la tecnología».</a:t>
             </a:r>
           </a:p>
         </p:txBody>
@@ -4569,7 +4569,7 @@
                 </a:solidFill>
                 <a:latin typeface="Nunito Sans"/>
               </a:rPr>
-              <a:t>Maialen cuenta: «En mi escuela de fútbol hay 40 chicos y 12 chicas» (ejemplo inventado). Naiara contesta: «¡Eso es un estereotipo!».</a:t>
+              <a:t>Una chica cuenta: «En mi escuela de fútbol hay 40 chicos y 12 chicas» (ejemplo inventado). Otra contesta: «¡Eso es un estereotipo!».</a:t>
             </a:r>
           </a:p>
         </p:txBody>
@@ -4617,7 +4617,7 @@
                 </a:solidFill>
                 <a:latin typeface="Nunito Sans"/>
               </a:rPr>
-              <a:t>¿Qué dice Maialen? Un número: cuántos chicos y chicas se han apuntado.</a:t>
+              <a:t>¿Qué dice la primera? Un número: cuántos chicos y chicas se han apuntado.</a:t>
             </a:r>
           </a:p>
           <a:p>
@@ -4896,7 +4896,7 @@
                 </a:solidFill>
                 <a:latin typeface="Nunito Sans"/>
               </a:rPr>
-              <a:t>Omar le dice a su hermana: «Organiza tú el cumpleaños de la ama, que las chicas sois más ordenadas». Lo dice como un elogio.</a:t>
+              <a:t>Un chico le dice a su hermana: «Organiza tú el cumpleaños de la ama, que las chicas sois más ordenadas». Lo dice como un elogio.</a:t>
             </a:r>
           </a:p>
         </p:txBody>

--- a/curso/pptx/S81.pptx
+++ b/curso/pptx/S81.pptx
@@ -3536,7 +3536,7 @@
                 </a:solidFill>
                 <a:latin typeface="Nunito Sans"/>
               </a:rPr>
-              <a:t>PENSAMIENTO CRÍTICO · SESIÓN 81 · UNIDAD 18 · DIFERENTES, PERO IGUALES</a:t>
+              <a:t>PENSAMIENTO CRÍTICO · SESIÓN 81 · UNIDAD 18 · GLOCAL: CULTURAS Y MIGRACIONES</a:t>
             </a:r>
           </a:p>
         </p:txBody>
@@ -3575,7 +3575,7 @@
                 </a:solidFill>
                 <a:latin typeface="Fredoka"/>
               </a:rPr>
-              <a:t>Sexo y género</a:t>
+              <a:t>¿Qué es una cultura?</a:t>
             </a:r>
           </a:p>
         </p:txBody>
@@ -3614,7 +3614,7 @@
                 </a:solidFill>
                 <a:latin typeface="Nunito Sans"/>
               </a:rPr>
-              <a:t>Solemos distinguir el sexo, que es biológico, del género: los roles y expectativas que cada sociedad asocia a ser hombre o mujer.</a:t>
+              <a:t>Una cultura es la forma de vivir que un grupo aprende y comparte; respetarla no obliga a aceptar lo que daña a las personas.</a:t>
             </a:r>
           </a:p>
         </p:txBody>
@@ -3633,7 +3633,7 @@
     <p:bg>
       <p:bgPr>
         <a:solidFill>
-          <a:srgbClr val="1F2A44"/>
+          <a:srgbClr val="FBF7EF"/>
         </a:solidFill>
         <a:effectLst/>
       </p:bgPr>
@@ -3653,8 +3653,8 @@
         </p:nvSpPr>
         <p:spPr>
           <a:xfrm>
-            <a:off x="640000" y="2300000"/>
-            <a:ext cx="10912000" cy="500000"/>
+            <a:off x="640000" y="380000"/>
+            <a:ext cx="10912000" cy="420000"/>
           </a:xfrm>
           <a:prstGeom prst="rect">
             <a:avLst/>
@@ -3669,17 +3669,17 @@
           <a:p>
             <a:pPr>
               <a:spcAft>
-                <a:spcPts val="810"/>
+                <a:spcPts val="630"/>
               </a:spcAft>
             </a:pPr>
             <a:r>
-              <a:rPr sz="1800" b="1">
-                <a:solidFill>
-                  <a:srgbClr val="F4B183"/>
-                </a:solidFill>
-                <a:latin typeface="Nunito Sans"/>
-              </a:rPr>
-              <a:t>BLOQUE 2</a:t>
+              <a:rPr sz="1400" b="1">
+                <a:solidFill>
+                  <a:srgbClr val="E8793A"/>
+                </a:solidFill>
+                <a:latin typeface="Nunito Sans"/>
+              </a:rPr>
+              <a:t>BLOQUE 2 · CASOS RESUELTOS</a:t>
             </a:r>
           </a:p>
         </p:txBody>
@@ -3692,7 +3692,7 @@
         </p:nvSpPr>
         <p:spPr>
           <a:xfrm>
-            <a:off x="640000" y="2800000"/>
+            <a:off x="640000" y="760000"/>
             <a:ext cx="10912000" cy="800000"/>
           </a:xfrm>
           <a:prstGeom prst="rect">
@@ -3708,17 +3708,222 @@
           <a:p>
             <a:pPr>
               <a:spcAft>
-                <a:spcPts val="2160"/>
+                <a:spcPts val="1710"/>
               </a:spcAft>
             </a:pPr>
             <a:r>
-              <a:rPr sz="4800" b="1">
-                <a:solidFill>
-                  <a:srgbClr val="FBF7EF"/>
+              <a:rPr sz="3800" b="1">
+                <a:solidFill>
+                  <a:srgbClr val="1F2A44"/>
                 </a:solidFill>
                 <a:latin typeface="Fredoka"/>
               </a:rPr>
-              <a:t>Estereotipos de género</a:t>
+              <a:t>Caso 1 · Cenar a las seis</a:t>
+            </a:r>
+          </a:p>
+        </p:txBody>
+      </p:sp>
+      <p:sp>
+        <p:nvSpPr>
+          <p:cNvPr id="4" name="Rectangle 3"/>
+          <p:cNvSpPr/>
+          <p:nvPr/>
+        </p:nvSpPr>
+        <p:spPr>
+          <a:xfrm>
+            <a:off x="640000" y="1600000"/>
+            <a:ext cx="10912000" cy="1100000"/>
+          </a:xfrm>
+          <a:prstGeom prst="rect">
+            <a:avLst/>
+          </a:prstGeom>
+          <a:solidFill>
+            <a:srgbClr val="FFFFFF"/>
+          </a:solidFill>
+          <a:ln>
+            <a:noFill/>
+          </a:ln>
+        </p:spPr>
+        <p:style>
+          <a:lnRef idx="1">
+            <a:schemeClr val="accent1"/>
+          </a:lnRef>
+          <a:fillRef idx="3">
+            <a:schemeClr val="accent1"/>
+          </a:fillRef>
+          <a:effectRef idx="2">
+            <a:schemeClr val="accent1"/>
+          </a:effectRef>
+          <a:fontRef idx="minor">
+            <a:schemeClr val="lt1"/>
+          </a:fontRef>
+        </p:style>
+        <p:txBody>
+          <a:bodyPr rtlCol="0" anchor="ctr"/>
+          <a:lstStyle/>
+          <a:p>
+            <a:pPr algn="ctr"/>
+          </a:p>
+        </p:txBody>
+      </p:sp>
+      <p:sp>
+        <p:nvSpPr>
+          <p:cNvPr id="5" name="TextBox 4"/>
+          <p:cNvSpPr txBox="1"/>
+          <p:nvPr/>
+        </p:nvSpPr>
+        <p:spPr>
+          <a:xfrm>
+            <a:off x="840000" y="1650000"/>
+            <a:ext cx="10512000" cy="1000000"/>
+          </a:xfrm>
+          <a:prstGeom prst="rect">
+            <a:avLst/>
+          </a:prstGeom>
+          <a:noFill/>
+        </p:spPr>
+        <p:txBody>
+          <a:bodyPr wrap="square" anchor="ctr">
+            <a:spAutoFit/>
+          </a:bodyPr>
+          <a:lstStyle/>
+          <a:p>
+            <a:pPr>
+              <a:spcAft>
+                <a:spcPts val="1170"/>
+              </a:spcAft>
+            </a:pPr>
+            <a:r>
+              <a:rPr sz="2600" b="1">
+                <a:solidFill>
+                  <a:srgbClr val="1F2A44"/>
+                </a:solidFill>
+                <a:latin typeface="Nunito Sans"/>
+              </a:rPr>
+              <a:t>Una chica viaja con su familia a otro país. Allí cenan a las seis de la tarde. Su padre comenta: «Qué gente más rara, cenar a esas horas no es normal».</a:t>
+            </a:r>
+          </a:p>
+        </p:txBody>
+      </p:sp>
+      <p:sp>
+        <p:nvSpPr>
+          <p:cNvPr id="6" name="TextBox 5"/>
+          <p:cNvSpPr txBox="1"/>
+          <p:nvPr/>
+        </p:nvSpPr>
+        <p:spPr>
+          <a:xfrm>
+            <a:off x="640000" y="2900000"/>
+            <a:ext cx="10912000" cy="3500000"/>
+          </a:xfrm>
+          <a:prstGeom prst="rect">
+            <a:avLst/>
+          </a:prstGeom>
+          <a:noFill/>
+        </p:spPr>
+        <p:txBody>
+          <a:bodyPr wrap="square">
+            <a:spAutoFit/>
+          </a:bodyPr>
+          <a:lstStyle/>
+          <a:p>
+            <a:pPr>
+              <a:spcAft>
+                <a:spcPts val="1080"/>
+              </a:spcAft>
+            </a:pPr>
+            <a:r>
+              <a:rPr sz="2400" b="1">
+                <a:solidFill>
+                  <a:srgbClr val="E8793A"/>
+                </a:solidFill>
+                <a:latin typeface="Nunito Sans"/>
+              </a:rPr>
+              <a:t>1. </a:t>
+            </a:r>
+            <a:r>
+              <a:rPr sz="2400" b="0">
+                <a:solidFill>
+                  <a:srgbClr val="1F2A44"/>
+                </a:solidFill>
+                <a:latin typeface="Nunito Sans"/>
+              </a:rPr>
+              <a:t>El padre mide la costumbre de otros con la suya: en Euskadi se cena tarde.</a:t>
+            </a:r>
+          </a:p>
+          <a:p>
+            <a:pPr>
+              <a:spcAft>
+                <a:spcPts val="1080"/>
+              </a:spcAft>
+            </a:pPr>
+            <a:r>
+              <a:rPr sz="2400" b="1">
+                <a:solidFill>
+                  <a:srgbClr val="E8793A"/>
+                </a:solidFill>
+                <a:latin typeface="Nunito Sans"/>
+              </a:rPr>
+              <a:t>2. </a:t>
+            </a:r>
+            <a:r>
+              <a:rPr sz="2400" b="0">
+                <a:solidFill>
+                  <a:srgbClr val="1F2A44"/>
+                </a:solidFill>
+                <a:latin typeface="Nunito Sans"/>
+              </a:rPr>
+              <a:t>Para ellos, los raros somos nosotros: cenamos a las nueve o a las diez.</a:t>
+            </a:r>
+          </a:p>
+          <a:p>
+            <a:pPr>
+              <a:spcAft>
+                <a:spcPts val="1080"/>
+              </a:spcAft>
+            </a:pPr>
+            <a:r>
+              <a:rPr sz="2400" b="1">
+                <a:solidFill>
+                  <a:srgbClr val="E8793A"/>
+                </a:solidFill>
+                <a:latin typeface="Nunito Sans"/>
+              </a:rPr>
+              <a:t>3. </a:t>
+            </a:r>
+            <a:r>
+              <a:rPr sz="2400" b="0">
+                <a:solidFill>
+                  <a:srgbClr val="1F2A44"/>
+                </a:solidFill>
+                <a:latin typeface="Nunito Sans"/>
+              </a:rPr>
+              <a:t>Nadie sale dañado por cenar a una hora u otra. Es solo una diferencia.</a:t>
+            </a:r>
+          </a:p>
+          <a:p>
+            <a:pPr>
+              <a:spcAft>
+                <a:spcPts val="1080"/>
+              </a:spcAft>
+            </a:pPr>
+            <a:r>
+              <a:rPr sz="2400" b="1">
+                <a:solidFill>
+                  <a:srgbClr val="E8793A"/>
+                </a:solidFill>
+                <a:latin typeface="Nunito Sans"/>
+              </a:rPr>
+              <a:t>4. </a:t>
+            </a:r>
+            <a:r>
+              <a:rPr sz="2400" b="0">
+                <a:solidFill>
+                  <a:srgbClr val="1F2A44"/>
+                </a:solidFill>
+                <a:latin typeface="Nunito Sans"/>
+              </a:rPr>
+              <a:t>Conclusión: es etnocentrismo. Juzgar lo distinto como raro solo porque no es lo mío.</a:t>
             </a:r>
           </a:p>
         </p:txBody>
@@ -3783,7 +3988,7 @@
                 </a:solidFill>
                 <a:latin typeface="Nunito Sans"/>
               </a:rPr>
-              <a:t>BLOQUE 2 · ESTEREOTIPOS DE GÉNERO</a:t>
+              <a:t>BLOQUE 2 · CASOS RESUELTOS</a:t>
             </a:r>
           </a:p>
         </p:txBody>
@@ -3822,7 +4027,7 @@
                 </a:solidFill>
                 <a:latin typeface="Fredoka"/>
               </a:rPr>
-              <a:t>Estereotipo de género</a:t>
+              <a:t>Caso 2 · Los zapatos en la puerta</a:t>
             </a:r>
           </a:p>
         </p:txBody>
@@ -3835,14 +4040,14 @@
         </p:nvSpPr>
         <p:spPr>
           <a:xfrm>
-            <a:off x="640000" y="1650000"/>
-            <a:ext cx="10912000" cy="1150000"/>
+            <a:off x="640000" y="1600000"/>
+            <a:ext cx="10912000" cy="1100000"/>
           </a:xfrm>
           <a:prstGeom prst="rect">
             <a:avLst/>
           </a:prstGeom>
           <a:solidFill>
-            <a:srgbClr val="EAF0F7"/>
+            <a:srgbClr val="FFFFFF"/>
           </a:solidFill>
           <a:ln>
             <a:noFill/>
@@ -3878,7 +4083,7 @@
         </p:nvSpPr>
         <p:spPr>
           <a:xfrm>
-            <a:off x="840000" y="1730000"/>
+            <a:off x="840000" y="1650000"/>
             <a:ext cx="10512000" cy="1000000"/>
           </a:xfrm>
           <a:prstGeom prst="rect">
@@ -3894,17 +4099,17 @@
           <a:p>
             <a:pPr>
               <a:spcAft>
-                <a:spcPts val="1260"/>
+                <a:spcPts val="1170"/>
               </a:spcAft>
             </a:pPr>
             <a:r>
-              <a:rPr sz="2800" b="1">
+              <a:rPr sz="2600" b="1">
                 <a:solidFill>
                   <a:srgbClr val="1F2A44"/>
                 </a:solidFill>
                 <a:latin typeface="Nunito Sans"/>
               </a:rPr>
-              <a:t>Un estereotipo de género es una idea fija y simplificada sobre cómo son o deben ser hombres o mujeres.</a:t>
+              <a:t>Vuelve el caso del principio: en casa de un chico se quitan los zapatos al entrar; en casa de otro, no. ¿Cuál lo hace bien?</a:t>
             </a:r>
           </a:p>
         </p:txBody>
@@ -3917,8 +4122,8 @@
         </p:nvSpPr>
         <p:spPr>
           <a:xfrm>
-            <a:off x="640000" y="3000000"/>
-            <a:ext cx="10912000" cy="3458000"/>
+            <a:off x="640000" y="2900000"/>
+            <a:ext cx="10912000" cy="3500000"/>
           </a:xfrm>
           <a:prstGeom prst="rect">
             <a:avLst/>
@@ -3933,130 +4138,101 @@
           <a:p>
             <a:pPr>
               <a:spcAft>
-                <a:spcPts val="1260"/>
+                <a:spcPts val="1080"/>
               </a:spcAft>
             </a:pPr>
             <a:r>
-              <a:rPr sz="2800" b="1">
+              <a:rPr sz="2400" b="1">
                 <a:solidFill>
                   <a:srgbClr val="E8793A"/>
                 </a:solidFill>
                 <a:latin typeface="Nunito Sans"/>
               </a:rPr>
-              <a:t>• </a:t>
-            </a:r>
-            <a:r>
-              <a:rPr sz="2800" b="0">
+              <a:t>1. </a:t>
+            </a:r>
+            <a:r>
+              <a:rPr sz="2400" b="0">
                 <a:solidFill>
                   <a:srgbClr val="1F2A44"/>
                 </a:solidFill>
                 <a:latin typeface="Nunito Sans"/>
               </a:rPr>
-              <a:t>Nace de </a:t>
-            </a:r>
-            <a:r>
-              <a:rPr sz="2800" b="1">
-                <a:solidFill>
-                  <a:srgbClr val="1F2A44"/>
-                </a:solidFill>
-                <a:latin typeface="Nunito Sans"/>
-              </a:rPr>
-              <a:t>generalizar</a:t>
-            </a:r>
-            <a:r>
-              <a:rPr sz="2800" b="0">
-                <a:solidFill>
-                  <a:srgbClr val="1F2A44"/>
-                </a:solidFill>
-                <a:latin typeface="Nunito Sans"/>
-              </a:rPr>
-              <a:t> deprisa, como vimos en la sesión 19</a:t>
+              <a:t>¿Hay alguien dañado en alguna de las dos casas? No.</a:t>
             </a:r>
           </a:p>
           <a:p>
             <a:pPr>
               <a:spcAft>
-                <a:spcPts val="1260"/>
+                <a:spcPts val="1080"/>
               </a:spcAft>
             </a:pPr>
             <a:r>
-              <a:rPr sz="2800" b="1">
+              <a:rPr sz="2400" b="1">
                 <a:solidFill>
                   <a:srgbClr val="E8793A"/>
                 </a:solidFill>
                 <a:latin typeface="Nunito Sans"/>
               </a:rPr>
-              <a:t>• </a:t>
-            </a:r>
-            <a:r>
-              <a:rPr sz="2800" b="0">
+              <a:t>2. </a:t>
+            </a:r>
+            <a:r>
+              <a:rPr sz="2400" b="0">
                 <a:solidFill>
                   <a:srgbClr val="1F2A44"/>
                 </a:solidFill>
                 <a:latin typeface="Nunito Sans"/>
               </a:rPr>
-              <a:t>Se parece al </a:t>
-            </a:r>
-            <a:r>
-              <a:rPr sz="2800" b="1">
-                <a:solidFill>
-                  <a:srgbClr val="1F2A44"/>
-                </a:solidFill>
-                <a:latin typeface="Nunito Sans"/>
-              </a:rPr>
-              <a:t>efecto halo</a:t>
-            </a:r>
-            <a:r>
-              <a:rPr sz="2800" b="0">
-                <a:solidFill>
-                  <a:srgbClr val="1F2A44"/>
-                </a:solidFill>
-                <a:latin typeface="Nunito Sans"/>
-              </a:rPr>
-              <a:t> (sesión 45): un rasgo decide todo</a:t>
+              <a:t>Cada costumbre tiene sus razones: limpieza, comodidad, respeto al hogar.</a:t>
             </a:r>
           </a:p>
           <a:p>
             <a:pPr>
               <a:spcAft>
-                <a:spcPts val="1260"/>
+                <a:spcPts val="1080"/>
               </a:spcAft>
             </a:pPr>
             <a:r>
-              <a:rPr sz="2800" b="1">
+              <a:rPr sz="2400" b="1">
                 <a:solidFill>
                   <a:srgbClr val="E8793A"/>
                 </a:solidFill>
                 <a:latin typeface="Nunito Sans"/>
               </a:rPr>
-              <a:t>• </a:t>
-            </a:r>
-            <a:r>
-              <a:rPr sz="2800" b="0">
+              <a:t>3. </a:t>
+            </a:r>
+            <a:r>
+              <a:rPr sz="2400" b="0">
                 <a:solidFill>
                   <a:srgbClr val="1F2A44"/>
                 </a:solidFill>
                 <a:latin typeface="Nunito Sans"/>
               </a:rPr>
-              <a:t>Pregunta que lo desmonta: «¿</a:t>
-            </a:r>
-            <a:r>
-              <a:rPr sz="2800" b="1">
+              <a:t>Lo razonable es fijarse y adaptarse cuando vas de invitado.</a:t>
+            </a:r>
+          </a:p>
+          <a:p>
+            <a:pPr>
+              <a:spcAft>
+                <a:spcPts val="1080"/>
+              </a:spcAft>
+            </a:pPr>
+            <a:r>
+              <a:rPr sz="2400" b="1">
+                <a:solidFill>
+                  <a:srgbClr val="E8793A"/>
+                </a:solidFill>
+                <a:latin typeface="Nunito Sans"/>
+              </a:rPr>
+              <a:t>4. </a:t>
+            </a:r>
+            <a:r>
+              <a:rPr sz="2400" b="0">
                 <a:solidFill>
                   <a:srgbClr val="1F2A44"/>
                 </a:solidFill>
                 <a:latin typeface="Nunito Sans"/>
               </a:rPr>
-              <a:t>cómo lo sabes</a:t>
-            </a:r>
-            <a:r>
-              <a:rPr sz="2800" b="0">
-                <a:solidFill>
-                  <a:srgbClr val="1F2A44"/>
-                </a:solidFill>
-                <a:latin typeface="Nunito Sans"/>
-              </a:rPr>
-              <a:t>? ¿Todas? ¿Todos?»</a:t>
+              <a:t>Conclusión: ninguna es mejor. Es una diferencia, no un error. Aquí el relativismo cultural funciona bien.</a:t>
             </a:r>
           </a:p>
         </p:txBody>
@@ -4070,6 +4246,444 @@
 </file>
 
 <file path=ppt/slides/slide12.xml><?xml version="1.0" encoding="utf-8"?>
+<p:sld xmlns:a="http://schemas.openxmlformats.org/drawingml/2006/main" xmlns:p="http://schemas.openxmlformats.org/presentationml/2006/main" xmlns:r="http://schemas.openxmlformats.org/officeDocument/2006/relationships">
+  <p:cSld>
+    <p:bg>
+      <p:bgPr>
+        <a:solidFill>
+          <a:srgbClr val="F6C9A8"/>
+        </a:solidFill>
+        <a:effectLst/>
+      </p:bgPr>
+    </p:bg>
+    <p:spTree>
+      <p:nvGrpSpPr>
+        <p:cNvPr id="1" name=""/>
+        <p:cNvGrpSpPr/>
+        <p:nvPr/>
+      </p:nvGrpSpPr>
+      <p:grpSpPr/>
+      <p:sp>
+        <p:nvSpPr>
+          <p:cNvPr id="2" name="TextBox 1"/>
+          <p:cNvSpPr txBox="1"/>
+          <p:nvPr/>
+        </p:nvSpPr>
+        <p:spPr>
+          <a:xfrm>
+            <a:off x="640000" y="380000"/>
+            <a:ext cx="10912000" cy="420000"/>
+          </a:xfrm>
+          <a:prstGeom prst="rect">
+            <a:avLst/>
+          </a:prstGeom>
+          <a:noFill/>
+        </p:spPr>
+        <p:txBody>
+          <a:bodyPr wrap="square">
+            <a:spAutoFit/>
+          </a:bodyPr>
+          <a:lstStyle/>
+          <a:p>
+            <a:pPr>
+              <a:spcAft>
+                <a:spcPts val="630"/>
+              </a:spcAft>
+            </a:pPr>
+            <a:r>
+              <a:rPr sz="1400" b="1">
+                <a:solidFill>
+                  <a:srgbClr val="1F2A44"/>
+                </a:solidFill>
+                <a:latin typeface="Nunito Sans"/>
+              </a:rPr>
+              <a:t>CASO TRAMPA · BLOQUE 2 · CASOS RESUELTOS</a:t>
+            </a:r>
+          </a:p>
+        </p:txBody>
+      </p:sp>
+      <p:sp>
+        <p:nvSpPr>
+          <p:cNvPr id="3" name="TextBox 2"/>
+          <p:cNvSpPr txBox="1"/>
+          <p:nvPr/>
+        </p:nvSpPr>
+        <p:spPr>
+          <a:xfrm>
+            <a:off x="640000" y="760000"/>
+            <a:ext cx="10912000" cy="800000"/>
+          </a:xfrm>
+          <a:prstGeom prst="rect">
+            <a:avLst/>
+          </a:prstGeom>
+          <a:noFill/>
+        </p:spPr>
+        <p:txBody>
+          <a:bodyPr wrap="square">
+            <a:spAutoFit/>
+          </a:bodyPr>
+          <a:lstStyle/>
+          <a:p>
+            <a:pPr>
+              <a:spcAft>
+                <a:spcPts val="1710"/>
+              </a:spcAft>
+            </a:pPr>
+            <a:r>
+              <a:rPr sz="3800" b="1">
+                <a:solidFill>
+                  <a:srgbClr val="1F2A44"/>
+                </a:solidFill>
+                <a:latin typeface="Fredoka"/>
+              </a:rPr>
+              <a:t>⚠ «Es nuestra tradición»</a:t>
+            </a:r>
+          </a:p>
+        </p:txBody>
+      </p:sp>
+      <p:sp>
+        <p:nvSpPr>
+          <p:cNvPr id="4" name="Rectangle 3"/>
+          <p:cNvSpPr/>
+          <p:nvPr/>
+        </p:nvSpPr>
+        <p:spPr>
+          <a:xfrm>
+            <a:off x="640000" y="1600000"/>
+            <a:ext cx="10912000" cy="1100000"/>
+          </a:xfrm>
+          <a:prstGeom prst="rect">
+            <a:avLst/>
+          </a:prstGeom>
+          <a:solidFill>
+            <a:srgbClr val="FBF7EF"/>
+          </a:solidFill>
+          <a:ln>
+            <a:noFill/>
+          </a:ln>
+        </p:spPr>
+        <p:style>
+          <a:lnRef idx="1">
+            <a:schemeClr val="accent1"/>
+          </a:lnRef>
+          <a:fillRef idx="3">
+            <a:schemeClr val="accent1"/>
+          </a:fillRef>
+          <a:effectRef idx="2">
+            <a:schemeClr val="accent1"/>
+          </a:effectRef>
+          <a:fontRef idx="minor">
+            <a:schemeClr val="lt1"/>
+          </a:fontRef>
+        </p:style>
+        <p:txBody>
+          <a:bodyPr rtlCol="0" anchor="ctr"/>
+          <a:lstStyle/>
+          <a:p>
+            <a:pPr algn="ctr"/>
+          </a:p>
+        </p:txBody>
+      </p:sp>
+      <p:sp>
+        <p:nvSpPr>
+          <p:cNvPr id="5" name="TextBox 4"/>
+          <p:cNvSpPr txBox="1"/>
+          <p:nvPr/>
+        </p:nvSpPr>
+        <p:spPr>
+          <a:xfrm>
+            <a:off x="840000" y="1650000"/>
+            <a:ext cx="10512000" cy="1000000"/>
+          </a:xfrm>
+          <a:prstGeom prst="rect">
+            <a:avLst/>
+          </a:prstGeom>
+          <a:noFill/>
+        </p:spPr>
+        <p:txBody>
+          <a:bodyPr wrap="square" anchor="ctr">
+            <a:spAutoFit/>
+          </a:bodyPr>
+          <a:lstStyle/>
+          <a:p>
+            <a:pPr>
+              <a:spcAft>
+                <a:spcPts val="1170"/>
+              </a:spcAft>
+            </a:pPr>
+            <a:r>
+              <a:rPr sz="2600" b="1">
+                <a:solidFill>
+                  <a:srgbClr val="1F2A44"/>
+                </a:solidFill>
+                <a:latin typeface="Nunito Sans"/>
+              </a:rPr>
+              <a:t>En un club inventado, a los nuevos se les humilla en público el primer día. Los veteranos dicen: «Es nuestra tradición. Si no la respetas, no respetas nuestra cultura».</a:t>
+            </a:r>
+          </a:p>
+        </p:txBody>
+      </p:sp>
+      <p:sp>
+        <p:nvSpPr>
+          <p:cNvPr id="6" name="TextBox 5"/>
+          <p:cNvSpPr txBox="1"/>
+          <p:nvPr/>
+        </p:nvSpPr>
+        <p:spPr>
+          <a:xfrm>
+            <a:off x="640000" y="2900000"/>
+            <a:ext cx="10912000" cy="3500000"/>
+          </a:xfrm>
+          <a:prstGeom prst="rect">
+            <a:avLst/>
+          </a:prstGeom>
+          <a:noFill/>
+        </p:spPr>
+        <p:txBody>
+          <a:bodyPr wrap="square">
+            <a:spAutoFit/>
+          </a:bodyPr>
+          <a:lstStyle/>
+          <a:p>
+            <a:pPr>
+              <a:spcAft>
+                <a:spcPts val="1080"/>
+              </a:spcAft>
+            </a:pPr>
+            <a:r>
+              <a:rPr sz="2400" b="1">
+                <a:solidFill>
+                  <a:srgbClr val="E8793A"/>
+                </a:solidFill>
+                <a:latin typeface="Nunito Sans"/>
+              </a:rPr>
+              <a:t>1. </a:t>
+            </a:r>
+            <a:r>
+              <a:rPr sz="2400" b="0">
+                <a:solidFill>
+                  <a:srgbClr val="1F2A44"/>
+                </a:solidFill>
+                <a:latin typeface="Nunito Sans"/>
+              </a:rPr>
+              <a:t>Es una costumbre del grupo. ¿Hay que respetarla?</a:t>
+            </a:r>
+          </a:p>
+          <a:p>
+            <a:pPr>
+              <a:spcAft>
+                <a:spcPts val="1080"/>
+              </a:spcAft>
+            </a:pPr>
+            <a:r>
+              <a:rPr sz="2400" b="1">
+                <a:solidFill>
+                  <a:srgbClr val="E8793A"/>
+                </a:solidFill>
+                <a:latin typeface="Nunito Sans"/>
+              </a:rPr>
+              <a:t>2. </a:t>
+            </a:r>
+            <a:r>
+              <a:rPr sz="2400" b="0">
+                <a:solidFill>
+                  <a:srgbClr val="1F2A44"/>
+                </a:solidFill>
+                <a:latin typeface="Nunito Sans"/>
+              </a:rPr>
+              <a:t>Parece que sí: hemos dicho que las costumbres distintas se respetan.</a:t>
+            </a:r>
+          </a:p>
+          <a:p>
+            <a:pPr>
+              <a:spcAft>
+                <a:spcPts val="1080"/>
+              </a:spcAft>
+            </a:pPr>
+            <a:r>
+              <a:rPr sz="2400" b="1">
+                <a:solidFill>
+                  <a:srgbClr val="E8793A"/>
+                </a:solidFill>
+                <a:latin typeface="Nunito Sans"/>
+              </a:rPr>
+              <a:t>3. </a:t>
+            </a:r>
+            <a:r>
+              <a:rPr sz="2400" b="0">
+                <a:solidFill>
+                  <a:srgbClr val="1F2A44"/>
+                </a:solidFill>
+                <a:latin typeface="Nunito Sans"/>
+              </a:rPr>
+              <a:t>Pero aquí hay personas dañadas: se humilla a los nuevos.</a:t>
+            </a:r>
+          </a:p>
+          <a:p>
+            <a:pPr>
+              <a:spcAft>
+                <a:spcPts val="1080"/>
+              </a:spcAft>
+            </a:pPr>
+            <a:r>
+              <a:rPr sz="2400" b="1">
+                <a:solidFill>
+                  <a:srgbClr val="E8793A"/>
+                </a:solidFill>
+                <a:latin typeface="Nunito Sans"/>
+              </a:rPr>
+              <a:t>4. </a:t>
+            </a:r>
+            <a:r>
+              <a:rPr sz="2400" b="0">
+                <a:solidFill>
+                  <a:srgbClr val="1F2A44"/>
+                </a:solidFill>
+                <a:latin typeface="Nunito Sans"/>
+              </a:rPr>
+              <a:t>Respetar costumbres tiene un límite: la dignidad y los derechos humanos de cada persona.</a:t>
+            </a:r>
+          </a:p>
+          <a:p>
+            <a:pPr>
+              <a:spcAft>
+                <a:spcPts val="1080"/>
+              </a:spcAft>
+            </a:pPr>
+            <a:r>
+              <a:rPr sz="2400" b="1">
+                <a:solidFill>
+                  <a:srgbClr val="E8793A"/>
+                </a:solidFill>
+                <a:latin typeface="Nunito Sans"/>
+              </a:rPr>
+              <a:t>5. </a:t>
+            </a:r>
+            <a:r>
+              <a:rPr sz="2400" b="0">
+                <a:solidFill>
+                  <a:srgbClr val="1F2A44"/>
+                </a:solidFill>
+                <a:latin typeface="Nunito Sans"/>
+              </a:rPr>
+              <a:t>Conclusión: que algo sea una tradición no lo hace bueno. Se puede criticar con razones.</a:t>
+            </a:r>
+          </a:p>
+        </p:txBody>
+      </p:sp>
+    </p:spTree>
+  </p:cSld>
+  <p:clrMapOvr>
+    <a:masterClrMapping/>
+  </p:clrMapOvr>
+</p:sld>
+</file>
+
+<file path=ppt/slides/slide13.xml><?xml version="1.0" encoding="utf-8"?>
+<p:sld xmlns:a="http://schemas.openxmlformats.org/drawingml/2006/main" xmlns:p="http://schemas.openxmlformats.org/presentationml/2006/main" xmlns:r="http://schemas.openxmlformats.org/officeDocument/2006/relationships">
+  <p:cSld>
+    <p:bg>
+      <p:bgPr>
+        <a:solidFill>
+          <a:srgbClr val="1F2A44"/>
+        </a:solidFill>
+        <a:effectLst/>
+      </p:bgPr>
+    </p:bg>
+    <p:spTree>
+      <p:nvGrpSpPr>
+        <p:cNvPr id="1" name=""/>
+        <p:cNvGrpSpPr/>
+        <p:nvPr/>
+      </p:nvGrpSpPr>
+      <p:grpSpPr/>
+      <p:sp>
+        <p:nvSpPr>
+          <p:cNvPr id="2" name="TextBox 1"/>
+          <p:cNvSpPr txBox="1"/>
+          <p:nvPr/>
+        </p:nvSpPr>
+        <p:spPr>
+          <a:xfrm>
+            <a:off x="640000" y="2300000"/>
+            <a:ext cx="10912000" cy="500000"/>
+          </a:xfrm>
+          <a:prstGeom prst="rect">
+            <a:avLst/>
+          </a:prstGeom>
+          <a:noFill/>
+        </p:spPr>
+        <p:txBody>
+          <a:bodyPr wrap="square">
+            <a:spAutoFit/>
+          </a:bodyPr>
+          <a:lstStyle/>
+          <a:p>
+            <a:pPr>
+              <a:spcAft>
+                <a:spcPts val="810"/>
+              </a:spcAft>
+            </a:pPr>
+            <a:r>
+              <a:rPr sz="1800" b="1">
+                <a:solidFill>
+                  <a:srgbClr val="F4B183"/>
+                </a:solidFill>
+                <a:latin typeface="Nunito Sans"/>
+              </a:rPr>
+              <a:t>BLOQUE 3</a:t>
+            </a:r>
+          </a:p>
+        </p:txBody>
+      </p:sp>
+      <p:sp>
+        <p:nvSpPr>
+          <p:cNvPr id="3" name="TextBox 2"/>
+          <p:cNvSpPr txBox="1"/>
+          <p:nvPr/>
+        </p:nvSpPr>
+        <p:spPr>
+          <a:xfrm>
+            <a:off x="640000" y="2800000"/>
+            <a:ext cx="10912000" cy="800000"/>
+          </a:xfrm>
+          <a:prstGeom prst="rect">
+            <a:avLst/>
+          </a:prstGeom>
+          <a:noFill/>
+        </p:spPr>
+        <p:txBody>
+          <a:bodyPr wrap="square">
+            <a:spAutoFit/>
+          </a:bodyPr>
+          <a:lstStyle/>
+          <a:p>
+            <a:pPr>
+              <a:spcAft>
+                <a:spcPts val="2160"/>
+              </a:spcAft>
+            </a:pPr>
+            <a:r>
+              <a:rPr sz="4800" b="1">
+                <a:solidFill>
+                  <a:srgbClr val="FBF7EF"/>
+                </a:solidFill>
+                <a:latin typeface="Fredoka"/>
+              </a:rPr>
+              <a:t>Error típico</a:t>
+            </a:r>
+          </a:p>
+        </p:txBody>
+      </p:sp>
+    </p:spTree>
+  </p:cSld>
+  <p:clrMapOvr>
+    <a:masterClrMapping/>
+  </p:clrMapOvr>
+</p:sld>
+</file>
+
+<file path=ppt/slides/slide14.xml><?xml version="1.0" encoding="utf-8"?>
 <p:sld xmlns:a="http://schemas.openxmlformats.org/drawingml/2006/main" xmlns:p="http://schemas.openxmlformats.org/presentationml/2006/main" xmlns:r="http://schemas.openxmlformats.org/officeDocument/2006/relationships">
   <p:cSld>
     <p:bg>
@@ -4121,7 +4735,7 @@
                 </a:solidFill>
                 <a:latin typeface="Nunito Sans"/>
               </a:rPr>
-              <a:t>BLOQUE 2 · ESTEREOTIPOS DE GÉNERO</a:t>
+              <a:t>BLOQUE 3 · ERROR TÍPICO</a:t>
             </a:r>
           </a:p>
         </p:txBody>
@@ -4160,7 +4774,7 @@
                 </a:solidFill>
                 <a:latin typeface="Fredoka"/>
               </a:rPr>
-              <a:t>Caso 1 · El equipo de robótica</a:t>
+              <a:t>Respetar una cultura</a:t>
             </a:r>
           </a:p>
         </p:txBody>
@@ -4173,14 +4787,14 @@
         </p:nvSpPr>
         <p:spPr>
           <a:xfrm>
-            <a:off x="640000" y="1600000"/>
-            <a:ext cx="10912000" cy="1100000"/>
+            <a:off x="640000" y="1650000"/>
+            <a:ext cx="5306000" cy="4400000"/>
           </a:xfrm>
           <a:prstGeom prst="rect">
             <a:avLst/>
           </a:prstGeom>
           <a:solidFill>
-            <a:srgbClr val="FFFFFF"/>
+            <a:srgbClr val="FBE3D2"/>
           </a:solidFill>
           <a:ln>
             <a:noFill/>
@@ -4216,8 +4830,8 @@
         </p:nvSpPr>
         <p:spPr>
           <a:xfrm>
-            <a:off x="840000" y="1650000"/>
-            <a:ext cx="10512000" cy="1000000"/>
+            <a:off x="840000" y="1750000"/>
+            <a:ext cx="4906000" cy="600000"/>
           </a:xfrm>
           <a:prstGeom prst="rect">
             <a:avLst/>
@@ -4225,7 +4839,46 @@
           <a:noFill/>
         </p:spPr>
         <p:txBody>
-          <a:bodyPr wrap="square" anchor="ctr">
+          <a:bodyPr wrap="square">
+            <a:spAutoFit/>
+          </a:bodyPr>
+          <a:lstStyle/>
+          <a:p>
+            <a:pPr>
+              <a:spcAft>
+                <a:spcPts val="1260"/>
+              </a:spcAft>
+            </a:pPr>
+            <a:r>
+              <a:rPr sz="2800" b="1">
+                <a:solidFill>
+                  <a:srgbClr val="C2531C"/>
+                </a:solidFill>
+                <a:latin typeface="Nunito Sans"/>
+              </a:rPr>
+              <a:t>No es</a:t>
+            </a:r>
+          </a:p>
+        </p:txBody>
+      </p:sp>
+      <p:sp>
+        <p:nvSpPr>
+          <p:cNvPr id="6" name="TextBox 5"/>
+          <p:cNvSpPr txBox="1"/>
+          <p:nvPr/>
+        </p:nvSpPr>
+        <p:spPr>
+          <a:xfrm>
+            <a:off x="840000" y="2400000"/>
+            <a:ext cx="4906000" cy="3500000"/>
+          </a:xfrm>
+          <a:prstGeom prst="rect">
+            <a:avLst/>
+          </a:prstGeom>
+          <a:noFill/>
+        </p:spPr>
+        <p:txBody>
+          <a:bodyPr wrap="square">
             <a:spAutoFit/>
           </a:bodyPr>
           <a:lstStyle/>
@@ -4238,276 +4891,90 @@
             <a:r>
               <a:rPr sz="2600" b="1">
                 <a:solidFill>
+                  <a:srgbClr val="E8793A"/>
+                </a:solidFill>
+                <a:latin typeface="Nunito Sans"/>
+              </a:rPr>
+              <a:t>• </a:t>
+            </a:r>
+            <a:r>
+              <a:rPr sz="2600" b="0">
+                <a:solidFill>
                   <a:srgbClr val="1F2A44"/>
                 </a:solidFill>
                 <a:latin typeface="Nunito Sans"/>
               </a:rPr>
-              <a:t>Un chico ve la lista del equipo de robótica del instituto y dice: «¿Una chica? Las chicas no valen para la tecnología».</a:t>
-            </a:r>
-          </a:p>
-        </p:txBody>
-      </p:sp>
-      <p:sp>
-        <p:nvSpPr>
-          <p:cNvPr id="6" name="TextBox 5"/>
-          <p:cNvSpPr txBox="1"/>
-          <p:nvPr/>
-        </p:nvSpPr>
-        <p:spPr>
-          <a:xfrm>
-            <a:off x="640000" y="2900000"/>
-            <a:ext cx="10912000" cy="3500000"/>
-          </a:xfrm>
-          <a:prstGeom prst="rect">
-            <a:avLst/>
-          </a:prstGeom>
-          <a:noFill/>
-        </p:spPr>
-        <p:txBody>
-          <a:bodyPr wrap="square">
-            <a:spAutoFit/>
-          </a:bodyPr>
-          <a:lstStyle/>
+              <a:t>Aceptar cualquier cosa porque «es su cultura»</a:t>
+            </a:r>
+          </a:p>
           <a:p>
             <a:pPr>
               <a:spcAft>
-                <a:spcPts val="1080"/>
+                <a:spcPts val="1170"/>
               </a:spcAft>
             </a:pPr>
             <a:r>
-              <a:rPr sz="2400" b="1">
+              <a:rPr sz="2600" b="1">
                 <a:solidFill>
                   <a:srgbClr val="E8793A"/>
                 </a:solidFill>
                 <a:latin typeface="Nunito Sans"/>
               </a:rPr>
-              <a:t>1. </a:t>
-            </a:r>
-            <a:r>
-              <a:rPr sz="2400" b="0">
+              <a:t>• </a:t>
+            </a:r>
+            <a:r>
+              <a:rPr sz="2600" b="0">
                 <a:solidFill>
                   <a:srgbClr val="1F2A44"/>
                 </a:solidFill>
                 <a:latin typeface="Nunito Sans"/>
               </a:rPr>
-              <a:t>¿Qué dice? Que </a:t>
-            </a:r>
-            <a:r>
-              <a:rPr sz="2400" b="1">
-                <a:solidFill>
-                  <a:srgbClr val="1F2A44"/>
-                </a:solidFill>
-                <a:latin typeface="Nunito Sans"/>
-              </a:rPr>
-              <a:t>todas</a:t>
-            </a:r>
-            <a:r>
-              <a:rPr sz="2400" b="0">
-                <a:solidFill>
-                  <a:srgbClr val="1F2A44"/>
-                </a:solidFill>
-                <a:latin typeface="Nunito Sans"/>
-              </a:rPr>
-              <a:t> las chicas son malas en tecnología.</a:t>
+              <a:t>Pensar que todos los de un país son iguales</a:t>
             </a:r>
           </a:p>
           <a:p>
             <a:pPr>
               <a:spcAft>
-                <a:spcPts val="1080"/>
+                <a:spcPts val="1170"/>
               </a:spcAft>
             </a:pPr>
             <a:r>
-              <a:rPr sz="2400" b="1">
+              <a:rPr sz="2600" b="1">
                 <a:solidFill>
                   <a:srgbClr val="E8793A"/>
                 </a:solidFill>
                 <a:latin typeface="Nunito Sans"/>
               </a:rPr>
-              <a:t>2. </a:t>
-            </a:r>
-            <a:r>
-              <a:rPr sz="2400" b="0">
+              <a:t>• </a:t>
+            </a:r>
+            <a:r>
+              <a:rPr sz="2600" b="0">
                 <a:solidFill>
                   <a:srgbClr val="1F2A44"/>
                 </a:solidFill>
                 <a:latin typeface="Nunito Sans"/>
               </a:rPr>
-              <a:t>¿Cómo lo sabe? No lo sabe: no conoce a esa chica ni ha visto lo que hace.</a:t>
-            </a:r>
-          </a:p>
-          <a:p>
-            <a:pPr>
-              <a:spcAft>
-                <a:spcPts val="1080"/>
-              </a:spcAft>
-            </a:pPr>
-            <a:r>
-              <a:rPr sz="2400" b="1">
-                <a:solidFill>
-                  <a:srgbClr val="E8793A"/>
-                </a:solidFill>
-                <a:latin typeface="Nunito Sans"/>
-              </a:rPr>
-              <a:t>3. </a:t>
-            </a:r>
-            <a:r>
-              <a:rPr sz="2400" b="0">
-                <a:solidFill>
-                  <a:srgbClr val="1F2A44"/>
-                </a:solidFill>
-                <a:latin typeface="Nunito Sans"/>
-              </a:rPr>
-              <a:t>Pasa de «es chica» a «no vale»: juzga a una persona entera por un rasgo.</a:t>
-            </a:r>
-          </a:p>
-          <a:p>
-            <a:pPr>
-              <a:spcAft>
-                <a:spcPts val="1080"/>
-              </a:spcAft>
-            </a:pPr>
-            <a:r>
-              <a:rPr sz="2400" b="1">
-                <a:solidFill>
-                  <a:srgbClr val="E8793A"/>
-                </a:solidFill>
-                <a:latin typeface="Nunito Sans"/>
-              </a:rPr>
-              <a:t>4. </a:t>
-            </a:r>
-            <a:r>
-              <a:rPr sz="2400" b="0">
-                <a:solidFill>
-                  <a:srgbClr val="1F2A44"/>
-                </a:solidFill>
-                <a:latin typeface="Nunito Sans"/>
-              </a:rPr>
-              <a:t>Conclusión: es un estereotipo. Para saber si alguien vale, hay que mirar lo que hace.</a:t>
-            </a:r>
-          </a:p>
-        </p:txBody>
-      </p:sp>
-    </p:spTree>
-  </p:cSld>
-  <p:clrMapOvr>
-    <a:masterClrMapping/>
-  </p:clrMapOvr>
-</p:sld>
-</file>
-
-<file path=ppt/slides/slide13.xml><?xml version="1.0" encoding="utf-8"?>
-<p:sld xmlns:a="http://schemas.openxmlformats.org/drawingml/2006/main" xmlns:p="http://schemas.openxmlformats.org/presentationml/2006/main" xmlns:r="http://schemas.openxmlformats.org/officeDocument/2006/relationships">
-  <p:cSld>
-    <p:bg>
-      <p:bgPr>
-        <a:solidFill>
-          <a:srgbClr val="FBF7EF"/>
-        </a:solidFill>
-        <a:effectLst/>
-      </p:bgPr>
-    </p:bg>
-    <p:spTree>
-      <p:nvGrpSpPr>
-        <p:cNvPr id="1" name=""/>
-        <p:cNvGrpSpPr/>
-        <p:nvPr/>
-      </p:nvGrpSpPr>
-      <p:grpSpPr/>
-      <p:sp>
-        <p:nvSpPr>
-          <p:cNvPr id="2" name="TextBox 1"/>
-          <p:cNvSpPr txBox="1"/>
-          <p:nvPr/>
-        </p:nvSpPr>
-        <p:spPr>
-          <a:xfrm>
-            <a:off x="640000" y="380000"/>
-            <a:ext cx="10912000" cy="420000"/>
-          </a:xfrm>
-          <a:prstGeom prst="rect">
-            <a:avLst/>
-          </a:prstGeom>
-          <a:noFill/>
-        </p:spPr>
-        <p:txBody>
-          <a:bodyPr wrap="square">
-            <a:spAutoFit/>
-          </a:bodyPr>
-          <a:lstStyle/>
-          <a:p>
-            <a:pPr>
-              <a:spcAft>
-                <a:spcPts val="630"/>
-              </a:spcAft>
-            </a:pPr>
-            <a:r>
-              <a:rPr sz="1400" b="1">
-                <a:solidFill>
-                  <a:srgbClr val="E8793A"/>
-                </a:solidFill>
-                <a:latin typeface="Nunito Sans"/>
-              </a:rPr>
-              <a:t>BLOQUE 2 · ESTEREOTIPOS DE GÉNERO</a:t>
-            </a:r>
-          </a:p>
-        </p:txBody>
-      </p:sp>
-      <p:sp>
-        <p:nvSpPr>
-          <p:cNvPr id="3" name="TextBox 2"/>
-          <p:cNvSpPr txBox="1"/>
-          <p:nvPr/>
-        </p:nvSpPr>
-        <p:spPr>
-          <a:xfrm>
-            <a:off x="640000" y="760000"/>
-            <a:ext cx="10912000" cy="800000"/>
-          </a:xfrm>
-          <a:prstGeom prst="rect">
-            <a:avLst/>
-          </a:prstGeom>
-          <a:noFill/>
-        </p:spPr>
-        <p:txBody>
-          <a:bodyPr wrap="square">
-            <a:spAutoFit/>
-          </a:bodyPr>
-          <a:lstStyle/>
-          <a:p>
-            <a:pPr>
-              <a:spcAft>
-                <a:spcPts val="1710"/>
-              </a:spcAft>
-            </a:pPr>
-            <a:r>
-              <a:rPr sz="3800" b="1">
-                <a:solidFill>
-                  <a:srgbClr val="1F2A44"/>
-                </a:solidFill>
-                <a:latin typeface="Fredoka"/>
-              </a:rPr>
-              <a:t>Caso 2 · Un dato no es un estereotipo</a:t>
-            </a:r>
-          </a:p>
-        </p:txBody>
-      </p:sp>
-      <p:sp>
-        <p:nvSpPr>
-          <p:cNvPr id="4" name="Rectangle 3"/>
+              <a:t>Llamar «raro» a lo que no conozco</a:t>
+            </a:r>
+          </a:p>
+        </p:txBody>
+      </p:sp>
+      <p:sp>
+        <p:nvSpPr>
+          <p:cNvPr id="7" name="Rectangle 6"/>
           <p:cNvSpPr/>
           <p:nvPr/>
         </p:nvSpPr>
         <p:spPr>
           <a:xfrm>
-            <a:off x="640000" y="1600000"/>
-            <a:ext cx="10912000" cy="1100000"/>
+            <a:off x="6246000" y="1650000"/>
+            <a:ext cx="5306000" cy="4400000"/>
           </a:xfrm>
           <a:prstGeom prst="rect">
             <a:avLst/>
           </a:prstGeom>
           <a:solidFill>
-            <a:srgbClr val="FFFFFF"/>
+            <a:srgbClr val="EAF0F7"/>
           </a:solidFill>
           <a:ln>
             <a:noFill/>
@@ -4537,14 +5004,14 @@
       </p:sp>
       <p:sp>
         <p:nvSpPr>
-          <p:cNvPr id="5" name="TextBox 4"/>
+          <p:cNvPr id="8" name="TextBox 7"/>
           <p:cNvSpPr txBox="1"/>
           <p:nvPr/>
         </p:nvSpPr>
         <p:spPr>
           <a:xfrm>
-            <a:off x="840000" y="1650000"/>
-            <a:ext cx="10512000" cy="1000000"/>
+            <a:off x="6446000" y="1750000"/>
+            <a:ext cx="4906000" cy="600000"/>
           </a:xfrm>
           <a:prstGeom prst="rect">
             <a:avLst/>
@@ -4552,7 +5019,46 @@
           <a:noFill/>
         </p:spPr>
         <p:txBody>
-          <a:bodyPr wrap="square" anchor="ctr">
+          <a:bodyPr wrap="square">
+            <a:spAutoFit/>
+          </a:bodyPr>
+          <a:lstStyle/>
+          <a:p>
+            <a:pPr>
+              <a:spcAft>
+                <a:spcPts val="1260"/>
+              </a:spcAft>
+            </a:pPr>
+            <a:r>
+              <a:rPr sz="2800" b="1">
+                <a:solidFill>
+                  <a:srgbClr val="2F6FB5"/>
+                </a:solidFill>
+                <a:latin typeface="Nunito Sans"/>
+              </a:rPr>
+              <a:t>Sí es</a:t>
+            </a:r>
+          </a:p>
+        </p:txBody>
+      </p:sp>
+      <p:sp>
+        <p:nvSpPr>
+          <p:cNvPr id="9" name="TextBox 8"/>
+          <p:cNvSpPr txBox="1"/>
+          <p:nvPr/>
+        </p:nvSpPr>
+        <p:spPr>
+          <a:xfrm>
+            <a:off x="6446000" y="2400000"/>
+            <a:ext cx="4906000" cy="3500000"/>
+          </a:xfrm>
+          <a:prstGeom prst="rect">
+            <a:avLst/>
+          </a:prstGeom>
+          <a:noFill/>
+        </p:spPr>
+        <p:txBody>
+          <a:bodyPr wrap="square">
             <a:spAutoFit/>
           </a:bodyPr>
           <a:lstStyle/>
@@ -4565,324 +5071,22 @@
             <a:r>
               <a:rPr sz="2600" b="1">
                 <a:solidFill>
+                  <a:srgbClr val="E8793A"/>
+                </a:solidFill>
+                <a:latin typeface="Nunito Sans"/>
+              </a:rPr>
+              <a:t>• </a:t>
+            </a:r>
+            <a:r>
+              <a:rPr sz="2600" b="0">
+                <a:solidFill>
                   <a:srgbClr val="1F2A44"/>
                 </a:solidFill>
                 <a:latin typeface="Nunito Sans"/>
               </a:rPr>
-              <a:t>Una chica cuenta: «En mi escuela de fútbol hay 40 chicos y 12 chicas» (ejemplo inventado). Otra contesta: «¡Eso es un estereotipo!».</a:t>
-            </a:r>
-          </a:p>
-        </p:txBody>
-      </p:sp>
-      <p:sp>
-        <p:nvSpPr>
-          <p:cNvPr id="6" name="TextBox 5"/>
-          <p:cNvSpPr txBox="1"/>
-          <p:nvPr/>
-        </p:nvSpPr>
-        <p:spPr>
-          <a:xfrm>
-            <a:off x="640000" y="2900000"/>
-            <a:ext cx="10912000" cy="3500000"/>
-          </a:xfrm>
-          <a:prstGeom prst="rect">
-            <a:avLst/>
-          </a:prstGeom>
-          <a:noFill/>
-        </p:spPr>
-        <p:txBody>
-          <a:bodyPr wrap="square">
-            <a:spAutoFit/>
-          </a:bodyPr>
-          <a:lstStyle/>
-          <a:p>
-            <a:pPr>
-              <a:spcAft>
-                <a:spcPts val="1080"/>
-              </a:spcAft>
-            </a:pPr>
-            <a:r>
-              <a:rPr sz="2400" b="1">
-                <a:solidFill>
-                  <a:srgbClr val="E8793A"/>
-                </a:solidFill>
-                <a:latin typeface="Nunito Sans"/>
-              </a:rPr>
-              <a:t>1. </a:t>
-            </a:r>
-            <a:r>
-              <a:rPr sz="2400" b="0">
-                <a:solidFill>
-                  <a:srgbClr val="1F2A44"/>
-                </a:solidFill>
-                <a:latin typeface="Nunito Sans"/>
-              </a:rPr>
-              <a:t>¿Qué dice la primera? Un número: cuántos chicos y chicas se han apuntado.</a:t>
-            </a:r>
-          </a:p>
-          <a:p>
-            <a:pPr>
-              <a:spcAft>
-                <a:spcPts val="1080"/>
-              </a:spcAft>
-            </a:pPr>
-            <a:r>
-              <a:rPr sz="2400" b="1">
-                <a:solidFill>
-                  <a:srgbClr val="E8793A"/>
-                </a:solidFill>
-                <a:latin typeface="Nunito Sans"/>
-              </a:rPr>
-              <a:t>2. </a:t>
-            </a:r>
-            <a:r>
-              <a:rPr sz="2400" b="0">
-                <a:solidFill>
-                  <a:srgbClr val="1F2A44"/>
-                </a:solidFill>
-                <a:latin typeface="Nunito Sans"/>
-              </a:rPr>
-              <a:t>Eso se puede </a:t>
-            </a:r>
-            <a:r>
-              <a:rPr sz="2400" b="1">
-                <a:solidFill>
-                  <a:srgbClr val="1F2A44"/>
-                </a:solidFill>
-                <a:latin typeface="Nunito Sans"/>
-              </a:rPr>
-              <a:t>comprobar</a:t>
-            </a:r>
-            <a:r>
-              <a:rPr sz="2400" b="0">
-                <a:solidFill>
-                  <a:srgbClr val="1F2A44"/>
-                </a:solidFill>
-                <a:latin typeface="Nunito Sans"/>
-              </a:rPr>
-              <a:t> contando. Es un dato, no una idea fija.</a:t>
-            </a:r>
-          </a:p>
-          <a:p>
-            <a:pPr>
-              <a:spcAft>
-                <a:spcPts val="1080"/>
-              </a:spcAft>
-            </a:pPr>
-            <a:r>
-              <a:rPr sz="2400" b="1">
-                <a:solidFill>
-                  <a:srgbClr val="E8793A"/>
-                </a:solidFill>
-                <a:latin typeface="Nunito Sans"/>
-              </a:rPr>
-              <a:t>3. </a:t>
-            </a:r>
-            <a:r>
-              <a:rPr sz="2400" b="0">
-                <a:solidFill>
-                  <a:srgbClr val="1F2A44"/>
-                </a:solidFill>
-                <a:latin typeface="Nunito Sans"/>
-              </a:rPr>
-              <a:t>El estereotipo sería otra frase: «las chicas no saben jugar al fútbol».</a:t>
-            </a:r>
-          </a:p>
-          <a:p>
-            <a:pPr>
-              <a:spcAft>
-                <a:spcPts val="1080"/>
-              </a:spcAft>
-            </a:pPr>
-            <a:r>
-              <a:rPr sz="2400" b="1">
-                <a:solidFill>
-                  <a:srgbClr val="E8793A"/>
-                </a:solidFill>
-                <a:latin typeface="Nunito Sans"/>
-              </a:rPr>
-              <a:t>4. </a:t>
-            </a:r>
-            <a:r>
-              <a:rPr sz="2400" b="0">
-                <a:solidFill>
-                  <a:srgbClr val="1F2A44"/>
-                </a:solidFill>
-                <a:latin typeface="Nunito Sans"/>
-              </a:rPr>
-              <a:t>Conclusión: describir una diferencia no es un estereotipo. Lo es atribuir un rasgo a cada persona por su grupo.</a:t>
-            </a:r>
-          </a:p>
-        </p:txBody>
-      </p:sp>
-    </p:spTree>
-  </p:cSld>
-  <p:clrMapOvr>
-    <a:masterClrMapping/>
-  </p:clrMapOvr>
-</p:sld>
-</file>
-
-<file path=ppt/slides/slide14.xml><?xml version="1.0" encoding="utf-8"?>
-<p:sld xmlns:a="http://schemas.openxmlformats.org/drawingml/2006/main" xmlns:p="http://schemas.openxmlformats.org/presentationml/2006/main" xmlns:r="http://schemas.openxmlformats.org/officeDocument/2006/relationships">
-  <p:cSld>
-    <p:bg>
-      <p:bgPr>
-        <a:solidFill>
-          <a:srgbClr val="F6C9A8"/>
-        </a:solidFill>
-        <a:effectLst/>
-      </p:bgPr>
-    </p:bg>
-    <p:spTree>
-      <p:nvGrpSpPr>
-        <p:cNvPr id="1" name=""/>
-        <p:cNvGrpSpPr/>
-        <p:nvPr/>
-      </p:nvGrpSpPr>
-      <p:grpSpPr/>
-      <p:sp>
-        <p:nvSpPr>
-          <p:cNvPr id="2" name="TextBox 1"/>
-          <p:cNvSpPr txBox="1"/>
-          <p:nvPr/>
-        </p:nvSpPr>
-        <p:spPr>
-          <a:xfrm>
-            <a:off x="640000" y="380000"/>
-            <a:ext cx="10912000" cy="420000"/>
-          </a:xfrm>
-          <a:prstGeom prst="rect">
-            <a:avLst/>
-          </a:prstGeom>
-          <a:noFill/>
-        </p:spPr>
-        <p:txBody>
-          <a:bodyPr wrap="square">
-            <a:spAutoFit/>
-          </a:bodyPr>
-          <a:lstStyle/>
-          <a:p>
-            <a:pPr>
-              <a:spcAft>
-                <a:spcPts val="630"/>
-              </a:spcAft>
-            </a:pPr>
-            <a:r>
-              <a:rPr sz="1400" b="1">
-                <a:solidFill>
-                  <a:srgbClr val="1F2A44"/>
-                </a:solidFill>
-                <a:latin typeface="Nunito Sans"/>
-              </a:rPr>
-              <a:t>CASO TRAMPA · BLOQUE 2 · ESTEREOTIPOS DE GÉNERO</a:t>
-            </a:r>
-          </a:p>
-        </p:txBody>
-      </p:sp>
-      <p:sp>
-        <p:nvSpPr>
-          <p:cNvPr id="3" name="TextBox 2"/>
-          <p:cNvSpPr txBox="1"/>
-          <p:nvPr/>
-        </p:nvSpPr>
-        <p:spPr>
-          <a:xfrm>
-            <a:off x="640000" y="760000"/>
-            <a:ext cx="10912000" cy="800000"/>
-          </a:xfrm>
-          <a:prstGeom prst="rect">
-            <a:avLst/>
-          </a:prstGeom>
-          <a:noFill/>
-        </p:spPr>
-        <p:txBody>
-          <a:bodyPr wrap="square">
-            <a:spAutoFit/>
-          </a:bodyPr>
-          <a:lstStyle/>
-          <a:p>
-            <a:pPr>
-              <a:spcAft>
-                <a:spcPts val="1710"/>
-              </a:spcAft>
-            </a:pPr>
-            <a:r>
-              <a:rPr sz="3800" b="1">
-                <a:solidFill>
-                  <a:srgbClr val="1F2A44"/>
-                </a:solidFill>
-                <a:latin typeface="Fredoka"/>
-              </a:rPr>
-              <a:t>⚠ Un estereotipo que suena bonito</a:t>
-            </a:r>
-          </a:p>
-        </p:txBody>
-      </p:sp>
-      <p:sp>
-        <p:nvSpPr>
-          <p:cNvPr id="4" name="Rectangle 3"/>
-          <p:cNvSpPr/>
-          <p:nvPr/>
-        </p:nvSpPr>
-        <p:spPr>
-          <a:xfrm>
-            <a:off x="640000" y="1600000"/>
-            <a:ext cx="10912000" cy="1100000"/>
-          </a:xfrm>
-          <a:prstGeom prst="rect">
-            <a:avLst/>
-          </a:prstGeom>
-          <a:solidFill>
-            <a:srgbClr val="FBF7EF"/>
-          </a:solidFill>
-          <a:ln>
-            <a:noFill/>
-          </a:ln>
-        </p:spPr>
-        <p:style>
-          <a:lnRef idx="1">
-            <a:schemeClr val="accent1"/>
-          </a:lnRef>
-          <a:fillRef idx="3">
-            <a:schemeClr val="accent1"/>
-          </a:fillRef>
-          <a:effectRef idx="2">
-            <a:schemeClr val="accent1"/>
-          </a:effectRef>
-          <a:fontRef idx="minor">
-            <a:schemeClr val="lt1"/>
-          </a:fontRef>
-        </p:style>
-        <p:txBody>
-          <a:bodyPr rtlCol="0" anchor="ctr"/>
-          <a:lstStyle/>
-          <a:p>
-            <a:pPr algn="ctr"/>
-          </a:p>
-        </p:txBody>
-      </p:sp>
-      <p:sp>
-        <p:nvSpPr>
-          <p:cNvPr id="5" name="TextBox 4"/>
-          <p:cNvSpPr txBox="1"/>
-          <p:nvPr/>
-        </p:nvSpPr>
-        <p:spPr>
-          <a:xfrm>
-            <a:off x="840000" y="1650000"/>
-            <a:ext cx="10512000" cy="1000000"/>
-          </a:xfrm>
-          <a:prstGeom prst="rect">
-            <a:avLst/>
-          </a:prstGeom>
-          <a:noFill/>
-        </p:spPr>
-        <p:txBody>
-          <a:bodyPr wrap="square" anchor="ctr">
-            <a:spAutoFit/>
-          </a:bodyPr>
-          <a:lstStyle/>
+              <a:t>Intentar entender antes de juzgar</a:t>
+            </a:r>
+          </a:p>
           <a:p>
             <a:pPr>
               <a:spcAft>
@@ -4892,159 +5096,45 @@
             <a:r>
               <a:rPr sz="2600" b="1">
                 <a:solidFill>
+                  <a:srgbClr val="E8793A"/>
+                </a:solidFill>
+                <a:latin typeface="Nunito Sans"/>
+              </a:rPr>
+              <a:t>• </a:t>
+            </a:r>
+            <a:r>
+              <a:rPr sz="2600" b="0">
+                <a:solidFill>
                   <a:srgbClr val="1F2A44"/>
                 </a:solidFill>
                 <a:latin typeface="Nunito Sans"/>
               </a:rPr>
-              <a:t>Un chico le dice a su hermana: «Organiza tú el cumpleaños de la ama, que las chicas sois más ordenadas». Lo dice como un elogio.</a:t>
-            </a:r>
-          </a:p>
-        </p:txBody>
-      </p:sp>
-      <p:sp>
-        <p:nvSpPr>
-          <p:cNvPr id="6" name="TextBox 5"/>
-          <p:cNvSpPr txBox="1"/>
-          <p:nvPr/>
-        </p:nvSpPr>
-        <p:spPr>
-          <a:xfrm>
-            <a:off x="640000" y="2900000"/>
-            <a:ext cx="10912000" cy="3500000"/>
-          </a:xfrm>
-          <a:prstGeom prst="rect">
-            <a:avLst/>
-          </a:prstGeom>
-          <a:noFill/>
-        </p:spPr>
-        <p:txBody>
-          <a:bodyPr wrap="square">
-            <a:spAutoFit/>
-          </a:bodyPr>
-          <a:lstStyle/>
+              <a:t>Ver a cada persona, no solo su origen</a:t>
+            </a:r>
+          </a:p>
           <a:p>
             <a:pPr>
               <a:spcAft>
-                <a:spcPts val="1080"/>
+                <a:spcPts val="1170"/>
               </a:spcAft>
             </a:pPr>
             <a:r>
-              <a:rPr sz="2400" b="1">
+              <a:rPr sz="2600" b="1">
                 <a:solidFill>
                   <a:srgbClr val="E8793A"/>
                 </a:solidFill>
                 <a:latin typeface="Nunito Sans"/>
               </a:rPr>
-              <a:t>1. </a:t>
-            </a:r>
-            <a:r>
-              <a:rPr sz="2400" b="0">
+              <a:t>• </a:t>
+            </a:r>
+            <a:r>
+              <a:rPr sz="2600" b="0">
                 <a:solidFill>
                   <a:srgbClr val="1F2A44"/>
                 </a:solidFill>
                 <a:latin typeface="Nunito Sans"/>
               </a:rPr>
-              <a:t>Si es un elogio, ¿puede ser un estereotipo?</a:t>
-            </a:r>
-          </a:p>
-          <a:p>
-            <a:pPr>
-              <a:spcAft>
-                <a:spcPts val="1080"/>
-              </a:spcAft>
-            </a:pPr>
-            <a:r>
-              <a:rPr sz="2400" b="1">
-                <a:solidFill>
-                  <a:srgbClr val="E8793A"/>
-                </a:solidFill>
-                <a:latin typeface="Nunito Sans"/>
-              </a:rPr>
-              <a:t>2. </a:t>
-            </a:r>
-            <a:r>
-              <a:rPr sz="2400" b="0">
-                <a:solidFill>
-                  <a:srgbClr val="1F2A44"/>
-                </a:solidFill>
-                <a:latin typeface="Nunito Sans"/>
-              </a:rPr>
-              <a:t>Parece que no: dice algo bueno de las chicas.</a:t>
-            </a:r>
-          </a:p>
-          <a:p>
-            <a:pPr>
-              <a:spcAft>
-                <a:spcPts val="1080"/>
-              </a:spcAft>
-            </a:pPr>
-            <a:r>
-              <a:rPr sz="2400" b="1">
-                <a:solidFill>
-                  <a:srgbClr val="E8793A"/>
-                </a:solidFill>
-                <a:latin typeface="Nunito Sans"/>
-              </a:rPr>
-              <a:t>3. </a:t>
-            </a:r>
-            <a:r>
-              <a:rPr sz="2400" b="0">
-                <a:solidFill>
-                  <a:srgbClr val="1F2A44"/>
-                </a:solidFill>
-                <a:latin typeface="Nunito Sans"/>
-              </a:rPr>
-              <a:t>Pero juzga a su hermana por ser chica, no por cómo es ella.</a:t>
-            </a:r>
-          </a:p>
-          <a:p>
-            <a:pPr>
-              <a:spcAft>
-                <a:spcPts val="1080"/>
-              </a:spcAft>
-            </a:pPr>
-            <a:r>
-              <a:rPr sz="2400" b="1">
-                <a:solidFill>
-                  <a:srgbClr val="E8793A"/>
-                </a:solidFill>
-                <a:latin typeface="Nunito Sans"/>
-              </a:rPr>
-              <a:t>4. </a:t>
-            </a:r>
-            <a:r>
-              <a:rPr sz="2400" b="0">
-                <a:solidFill>
-                  <a:srgbClr val="1F2A44"/>
-                </a:solidFill>
-                <a:latin typeface="Nunito Sans"/>
-              </a:rPr>
-              <a:t>Y de paso le carga a ella la tarea, y a él se la quita.</a:t>
-            </a:r>
-          </a:p>
-          <a:p>
-            <a:pPr>
-              <a:spcAft>
-                <a:spcPts val="1080"/>
-              </a:spcAft>
-            </a:pPr>
-            <a:r>
-              <a:rPr sz="2400" b="1">
-                <a:solidFill>
-                  <a:srgbClr val="E8793A"/>
-                </a:solidFill>
-                <a:latin typeface="Nunito Sans"/>
-              </a:rPr>
-              <a:t>5. </a:t>
-            </a:r>
-            <a:r>
-              <a:rPr sz="2400" b="0">
-                <a:solidFill>
-                  <a:srgbClr val="1F2A44"/>
-                </a:solidFill>
-                <a:latin typeface="Nunito Sans"/>
-              </a:rPr>
-              <a:t>Conclusión: un estereotipo que suena bien sigue siendo un estereotipo. También encierra a las personas en un papel.</a:t>
+              <a:t>Criticar con razones lo que daña a alguien</a:t>
             </a:r>
           </a:p>
         </p:txBody>
@@ -5300,7 +5390,7 @@
                 </a:solidFill>
                 <a:latin typeface="Nunito Sans"/>
               </a:rPr>
-              <a:t>Solemos distinguir el sexo, que es biológico, del género, que es social.</a:t>
+              <a:t>Una cultura es la forma de vivir que un grupo aprende, comparte y pasa a otros.</a:t>
             </a:r>
           </a:p>
           <a:p>
@@ -5325,7 +5415,7 @@
                 </a:solidFill>
                 <a:latin typeface="Nunito Sans"/>
               </a:rPr>
-              <a:t>Los roles de género se aprenden y cambian con las épocas y los lugares.</a:t>
+              <a:t>El etnocentrismo mide las demás culturas con la propia y llama raro a lo distinto.</a:t>
             </a:r>
           </a:p>
           <a:p>
@@ -5350,7 +5440,7 @@
                 </a:solidFill>
                 <a:latin typeface="Nunito Sans"/>
               </a:rPr>
-              <a:t>Un estereotipo de género juzga a una persona por su grupo, aunque suene a elogio.</a:t>
+              <a:t>Respetar costumbres tiene un límite: los derechos humanos de cada persona.</a:t>
             </a:r>
           </a:p>
         </p:txBody>
@@ -5454,7 +5544,7 @@
                 </a:solidFill>
                 <a:latin typeface="Fredoka"/>
               </a:rPr>
-              <a:t>La diferencia entre sexo y género y qué son los estereotipos de género</a:t>
+              <a:t>Qué es la cultura y las posturas ante la diversidad cultural: etnocentrismo y relativismo</a:t>
             </a:r>
           </a:p>
         </p:txBody>
@@ -5493,7 +5583,7 @@
                 </a:solidFill>
                 <a:latin typeface="Nunito Sans"/>
               </a:rPr>
-              <a:t>Oír con otras palabras la distinción de hoy y ver ejemplos de estereotipos en anuncios y juguetes.</a:t>
+              <a:t>Que vean otros ejemplos de etnocentrismo y del límite del relativismo, distintos a los de clase.</a:t>
             </a:r>
           </a:p>
         </p:txBody>
@@ -6151,7 +6241,7 @@
                 </a:solidFill>
                 <a:latin typeface="Nunito Sans"/>
               </a:rPr>
-              <a:t>Tomar mi familia como «la normal» es una generalización ______.  (sesión 80)</a:t>
+              <a:t>En el consentimiento, callarse o no decir «no» ______ es un sí.  (sesión 80)</a:t>
             </a:r>
           </a:p>
           <a:p>
@@ -6176,7 +6266,7 @@
                 </a:solidFill>
                 <a:latin typeface="Nunito Sans"/>
               </a:rPr>
-              <a:t>Una familia ______ la forman una madre o un padre solo con sus hijos.  (sesión 80)</a:t>
+              <a:t>La orientación ______ es hacia quién siente una persona atracción y amor.  (sesión 80)</a:t>
             </a:r>
           </a:p>
           <a:p>
@@ -6353,7 +6443,7 @@
                 </a:solidFill>
                 <a:latin typeface="Nunito Sans"/>
               </a:rPr>
-              <a:t>Tomar mi familia como «la normal» es una generalización </a:t>
+              <a:t>En el consentimiento, callarse o no decir «no» </a:t>
             </a:r>
             <a:r>
               <a:rPr sz="2600" b="1">
@@ -6362,7 +6452,7 @@
                 </a:solidFill>
                 <a:latin typeface="Nunito Sans"/>
               </a:rPr>
-              <a:t>apresurada</a:t>
+              <a:t>no</a:t>
             </a:r>
             <a:r>
               <a:rPr sz="2600" b="0">
@@ -6371,7 +6461,7 @@
                 </a:solidFill>
                 <a:latin typeface="Nunito Sans"/>
               </a:rPr>
-              <a:t>.  (sesión 80)</a:t>
+              <a:t> es un sí.  (sesión 80)</a:t>
             </a:r>
           </a:p>
           <a:p>
@@ -6396,7 +6486,7 @@
                 </a:solidFill>
                 <a:latin typeface="Nunito Sans"/>
               </a:rPr>
-              <a:t>Una familia </a:t>
+              <a:t>La orientación </a:t>
             </a:r>
             <a:r>
               <a:rPr sz="2600" b="1">
@@ -6405,7 +6495,7 @@
                 </a:solidFill>
                 <a:latin typeface="Nunito Sans"/>
               </a:rPr>
-              <a:t>monoparental</a:t>
+              <a:t>sexual</a:t>
             </a:r>
             <a:r>
               <a:rPr sz="2600" b="0">
@@ -6414,7 +6504,7 @@
                 </a:solidFill>
                 <a:latin typeface="Nunito Sans"/>
               </a:rPr>
-              <a:t> la forman una madre o un padre solo con sus hijos.  (sesión 80)</a:t>
+              <a:t> es hacia quién siente una persona atracción y amor.  (sesión 80)</a:t>
             </a:r>
           </a:p>
           <a:p>
@@ -6604,7 +6694,7 @@
                 </a:solidFill>
                 <a:latin typeface="Nunito Sans"/>
               </a:rPr>
-              <a:t>En una tienda de juguetes hay dos pasillos: uno rosa, con muñecas y cocinitas; otro azul, con balones y coches.</a:t>
+              <a:t>En casa de un chico todos se quitan los zapatos al entrar. En casa de otro, nadie. La primera vez, el segundo se quedó parado en la puerta del primero.</a:t>
             </a:r>
           </a:p>
         </p:txBody>
@@ -6643,7 +6733,7 @@
                 </a:solidFill>
                 <a:latin typeface="Nunito Sans"/>
               </a:rPr>
-              <a:t>¿Quién decidió qué juguetes son «de chicas» y cuáles «de chicos»?</a:t>
+              <a:t>¿Cuál de las dos casas lo hace bien?</a:t>
             </a:r>
           </a:p>
         </p:txBody>
@@ -6747,7 +6837,7 @@
                 </a:solidFill>
                 <a:latin typeface="Fredoka"/>
               </a:rPr>
-              <a:t>Dos palabras distintas</a:t>
+              <a:t>Qué es una cultura</a:t>
             </a:r>
           </a:p>
         </p:txBody>
@@ -6812,7 +6902,7 @@
                 </a:solidFill>
                 <a:latin typeface="Nunito Sans"/>
               </a:rPr>
-              <a:t>BLOQUE 1 · DOS PALABRAS DISTINTAS</a:t>
+              <a:t>BLOQUE 1 · QUÉ ES UNA CULTURA</a:t>
             </a:r>
           </a:p>
         </p:txBody>
@@ -6851,7 +6941,7 @@
                 </a:solidFill>
                 <a:latin typeface="Fredoka"/>
               </a:rPr>
-              <a:t>Sexo</a:t>
+              <a:t>Cultura</a:t>
             </a:r>
           </a:p>
         </p:txBody>
@@ -6933,7 +7023,7 @@
                 </a:solidFill>
                 <a:latin typeface="Nunito Sans"/>
               </a:rPr>
-              <a:t>Llamamos sexo a las características biológicas del cuerpo: cromosomas, hormonas y órganos.</a:t>
+              <a:t>Es la forma de vivir que un grupo aprende, comparte y pasa a los que vienen después.</a:t>
             </a:r>
           </a:p>
         </p:txBody>
@@ -6981,7 +7071,7 @@
                 </a:solidFill>
                 <a:latin typeface="Nunito Sans"/>
               </a:rPr>
-              <a:t>Viene con el </a:t>
+              <a:t>Se </a:t>
             </a:r>
             <a:r>
               <a:rPr sz="2800" b="1">
@@ -6990,7 +7080,16 @@
                 </a:solidFill>
                 <a:latin typeface="Nunito Sans"/>
               </a:rPr>
-              <a:t>cuerpo</a:t>
+              <a:t>aprende</a:t>
+            </a:r>
+            <a:r>
+              <a:rPr sz="2800" b="0">
+                <a:solidFill>
+                  <a:srgbClr val="1F2A44"/>
+                </a:solidFill>
+                <a:latin typeface="Nunito Sans"/>
+              </a:rPr>
+              <a:t>: no viene en los genes</a:t>
             </a:r>
           </a:p>
           <a:p>
@@ -7015,25 +7114,7 @@
                 </a:solidFill>
                 <a:latin typeface="Nunito Sans"/>
               </a:rPr>
-              <a:t>Lo estudian la </a:t>
-            </a:r>
-            <a:r>
-              <a:rPr sz="2800" b="1">
-                <a:solidFill>
-                  <a:srgbClr val="1F2A44"/>
-                </a:solidFill>
-                <a:latin typeface="Nunito Sans"/>
-              </a:rPr>
-              <a:t>biología</a:t>
-            </a:r>
-            <a:r>
-              <a:rPr sz="2800" b="0">
-                <a:solidFill>
-                  <a:srgbClr val="1F2A44"/>
-                </a:solidFill>
-                <a:latin typeface="Nunito Sans"/>
-              </a:rPr>
-              <a:t> y la medicina</a:t>
+              <a:t>Todos los grupos humanos tienen cultura</a:t>
             </a:r>
           </a:p>
           <a:p>
@@ -7058,7 +7139,68 @@
                 </a:solidFill>
                 <a:latin typeface="Nunito Sans"/>
               </a:rPr>
-              <a:t>Ejemplo: la voz cambia en la pubertad por las hormonas</a:t>
+              <a:t>Hay muchas </a:t>
+            </a:r>
+            <a:r>
+              <a:rPr sz="2800" b="1">
+                <a:solidFill>
+                  <a:srgbClr val="1F2A44"/>
+                </a:solidFill>
+                <a:latin typeface="Nunito Sans"/>
+              </a:rPr>
+              <a:t>culturas</a:t>
+            </a:r>
+            <a:r>
+              <a:rPr sz="2800" b="0">
+                <a:solidFill>
+                  <a:srgbClr val="1F2A44"/>
+                </a:solidFill>
+                <a:latin typeface="Nunito Sans"/>
+              </a:rPr>
+              <a:t>, y cambian con el tiempo</a:t>
+            </a:r>
+          </a:p>
+          <a:p>
+            <a:pPr>
+              <a:spcAft>
+                <a:spcPts val="1260"/>
+              </a:spcAft>
+            </a:pPr>
+            <a:r>
+              <a:rPr sz="2800" b="1">
+                <a:solidFill>
+                  <a:srgbClr val="E8793A"/>
+                </a:solidFill>
+                <a:latin typeface="Nunito Sans"/>
+              </a:rPr>
+              <a:t>• </a:t>
+            </a:r>
+            <a:r>
+              <a:rPr sz="2800" b="0">
+                <a:solidFill>
+                  <a:srgbClr val="1F2A44"/>
+                </a:solidFill>
+                <a:latin typeface="Nunito Sans"/>
+              </a:rPr>
+              <a:t>Una persona puede vivir en </a:t>
+            </a:r>
+            <a:r>
+              <a:rPr sz="2800" b="1">
+                <a:solidFill>
+                  <a:srgbClr val="1F2A44"/>
+                </a:solidFill>
+                <a:latin typeface="Nunito Sans"/>
+              </a:rPr>
+              <a:t>varias</a:t>
+            </a:r>
+            <a:r>
+              <a:rPr sz="2800" b="0">
+                <a:solidFill>
+                  <a:srgbClr val="1F2A44"/>
+                </a:solidFill>
+                <a:latin typeface="Nunito Sans"/>
+              </a:rPr>
+              <a:t> a la vez</a:t>
             </a:r>
           </a:p>
         </p:txBody>
@@ -7123,7 +7265,7 @@
                 </a:solidFill>
                 <a:latin typeface="Nunito Sans"/>
               </a:rPr>
-              <a:t>BLOQUE 1 · DOS PALABRAS DISTINTAS</a:t>
+              <a:t>BLOQUE 1 · QUÉ ES UNA CULTURA</a:t>
             </a:r>
           </a:p>
         </p:txBody>
@@ -7162,252 +7304,303 @@
                 </a:solidFill>
                 <a:latin typeface="Fredoka"/>
               </a:rPr>
-              <a:t>Género</a:t>
-            </a:r>
-          </a:p>
-        </p:txBody>
-      </p:sp>
-      <p:sp>
-        <p:nvSpPr>
-          <p:cNvPr id="4" name="Rectangle 3"/>
-          <p:cNvSpPr/>
+              <a:t>Elementos de una cultura</a:t>
+            </a:r>
+          </a:p>
+        </p:txBody>
+      </p:sp>
+      <p:graphicFrame>
+        <p:nvGraphicFramePr>
+          <p:cNvPr id="4" name="Table 3"/>
+          <p:cNvGraphicFramePr>
+            <a:graphicFrameLocks noGrp="1"/>
+          </p:cNvGraphicFramePr>
           <p:nvPr/>
-        </p:nvSpPr>
-        <p:spPr>
-          <a:xfrm>
-            <a:off x="640000" y="1650000"/>
-            <a:ext cx="10912000" cy="1150000"/>
-          </a:xfrm>
-          <a:prstGeom prst="rect">
-            <a:avLst/>
-          </a:prstGeom>
-          <a:solidFill>
-            <a:srgbClr val="EAF0F7"/>
-          </a:solidFill>
-          <a:ln>
-            <a:noFill/>
-          </a:ln>
-        </p:spPr>
-        <p:style>
-          <a:lnRef idx="1">
-            <a:schemeClr val="accent1"/>
-          </a:lnRef>
-          <a:fillRef idx="3">
-            <a:schemeClr val="accent1"/>
-          </a:fillRef>
-          <a:effectRef idx="2">
-            <a:schemeClr val="accent1"/>
-          </a:effectRef>
-          <a:fontRef idx="minor">
-            <a:schemeClr val="lt1"/>
-          </a:fontRef>
-        </p:style>
-        <p:txBody>
-          <a:bodyPr rtlCol="0" anchor="ctr"/>
-          <a:lstStyle/>
-          <a:p>
-            <a:pPr algn="ctr"/>
-          </a:p>
-        </p:txBody>
-      </p:sp>
-      <p:sp>
-        <p:nvSpPr>
-          <p:cNvPr id="5" name="TextBox 4"/>
-          <p:cNvSpPr txBox="1"/>
-          <p:nvPr/>
-        </p:nvSpPr>
-        <p:spPr>
-          <a:xfrm>
-            <a:off x="840000" y="1730000"/>
-            <a:ext cx="10512000" cy="1000000"/>
-          </a:xfrm>
-          <a:prstGeom prst="rect">
-            <a:avLst/>
-          </a:prstGeom>
-          <a:noFill/>
-        </p:spPr>
-        <p:txBody>
-          <a:bodyPr wrap="square" anchor="ctr">
-            <a:spAutoFit/>
-          </a:bodyPr>
-          <a:lstStyle/>
-          <a:p>
-            <a:pPr>
-              <a:spcAft>
-                <a:spcPts val="1260"/>
-              </a:spcAft>
-            </a:pPr>
-            <a:r>
-              <a:rPr sz="2800" b="1">
-                <a:solidFill>
-                  <a:srgbClr val="1F2A44"/>
-                </a:solidFill>
-                <a:latin typeface="Nunito Sans"/>
-              </a:rPr>
-              <a:t>El género son los roles y las expectativas que una sociedad asocia a ser hombre o mujer.</a:t>
-            </a:r>
-          </a:p>
-        </p:txBody>
-      </p:sp>
-      <p:sp>
-        <p:nvSpPr>
-          <p:cNvPr id="6" name="TextBox 5"/>
-          <p:cNvSpPr txBox="1"/>
-          <p:nvPr/>
-        </p:nvSpPr>
-        <p:spPr>
-          <a:xfrm>
-            <a:off x="640000" y="3000000"/>
-            <a:ext cx="10912000" cy="3458000"/>
-          </a:xfrm>
-          <a:prstGeom prst="rect">
-            <a:avLst/>
-          </a:prstGeom>
-          <a:noFill/>
-        </p:spPr>
-        <p:txBody>
-          <a:bodyPr wrap="square">
-            <a:spAutoFit/>
-          </a:bodyPr>
-          <a:lstStyle/>
-          <a:p>
-            <a:pPr>
-              <a:spcAft>
-                <a:spcPts val="1260"/>
-              </a:spcAft>
-            </a:pPr>
-            <a:r>
-              <a:rPr sz="2800" b="1">
-                <a:solidFill>
-                  <a:srgbClr val="E8793A"/>
-                </a:solidFill>
-                <a:latin typeface="Nunito Sans"/>
-              </a:rPr>
-              <a:t>• </a:t>
-            </a:r>
-            <a:r>
-              <a:rPr sz="2800" b="1">
-                <a:solidFill>
-                  <a:srgbClr val="1F2A44"/>
-                </a:solidFill>
-                <a:latin typeface="Nunito Sans"/>
-              </a:rPr>
-              <a:t>Rol:</a:t>
-            </a:r>
-            <a:r>
-              <a:rPr sz="2800" b="0">
-                <a:solidFill>
-                  <a:srgbClr val="1F2A44"/>
-                </a:solidFill>
-                <a:latin typeface="Nunito Sans"/>
-              </a:rPr>
-              <a:t> el papel que se espera que hagas</a:t>
-            </a:r>
-          </a:p>
-          <a:p>
-            <a:pPr>
-              <a:spcAft>
-                <a:spcPts val="1260"/>
-              </a:spcAft>
-            </a:pPr>
-            <a:r>
-              <a:rPr sz="2800" b="1">
-                <a:solidFill>
-                  <a:srgbClr val="E8793A"/>
-                </a:solidFill>
-                <a:latin typeface="Nunito Sans"/>
-              </a:rPr>
-              <a:t>• </a:t>
-            </a:r>
-            <a:r>
-              <a:rPr sz="2800" b="0">
-                <a:solidFill>
-                  <a:srgbClr val="1F2A44"/>
-                </a:solidFill>
-                <a:latin typeface="Nunito Sans"/>
-              </a:rPr>
-              <a:t>Se </a:t>
-            </a:r>
-            <a:r>
-              <a:rPr sz="2800" b="1">
-                <a:solidFill>
-                  <a:srgbClr val="1F2A44"/>
-                </a:solidFill>
-                <a:latin typeface="Nunito Sans"/>
-              </a:rPr>
-              <a:t>aprende</a:t>
-            </a:r>
-            <a:r>
-              <a:rPr sz="2800" b="0">
-                <a:solidFill>
-                  <a:srgbClr val="1F2A44"/>
-                </a:solidFill>
-                <a:latin typeface="Nunito Sans"/>
-              </a:rPr>
-              <a:t>: en casa, en la escuela, en las pantallas</a:t>
-            </a:r>
-          </a:p>
-          <a:p>
-            <a:pPr>
-              <a:spcAft>
-                <a:spcPts val="1260"/>
-              </a:spcAft>
-            </a:pPr>
-            <a:r>
-              <a:rPr sz="2800" b="1">
-                <a:solidFill>
-                  <a:srgbClr val="E8793A"/>
-                </a:solidFill>
-                <a:latin typeface="Nunito Sans"/>
-              </a:rPr>
-              <a:t>• </a:t>
-            </a:r>
-            <a:r>
-              <a:rPr sz="2800" b="0">
-                <a:solidFill>
-                  <a:srgbClr val="1F2A44"/>
-                </a:solidFill>
-                <a:latin typeface="Nunito Sans"/>
-              </a:rPr>
-              <a:t>Ejemplo: «los chicos no lloran», «las chicas cuidan»</a:t>
-            </a:r>
-          </a:p>
-          <a:p>
-            <a:pPr>
-              <a:spcAft>
-                <a:spcPts val="1260"/>
-              </a:spcAft>
-            </a:pPr>
-            <a:r>
-              <a:rPr sz="2800" b="1">
-                <a:solidFill>
-                  <a:srgbClr val="E8793A"/>
-                </a:solidFill>
-                <a:latin typeface="Nunito Sans"/>
-              </a:rPr>
-              <a:t>• </a:t>
-            </a:r>
-            <a:r>
-              <a:rPr sz="2800" b="1">
-                <a:solidFill>
-                  <a:srgbClr val="1F2A44"/>
-                </a:solidFill>
-                <a:latin typeface="Nunito Sans"/>
-              </a:rPr>
-              <a:t>Solemos distinguir</a:t>
-            </a:r>
-            <a:r>
-              <a:rPr sz="2800" b="0">
-                <a:solidFill>
-                  <a:srgbClr val="1F2A44"/>
-                </a:solidFill>
-                <a:latin typeface="Nunito Sans"/>
-              </a:rPr>
-              <a:t> así; hay quien lo explica de otras formas</a:t>
-            </a:r>
-          </a:p>
-        </p:txBody>
-      </p:sp>
+        </p:nvGraphicFramePr>
+        <p:xfrm>
+          <a:off x="640000" y="1700000"/>
+          <a:ext cx="10912000" cy="3000000"/>
+        </p:xfrm>
+        <a:graphic>
+          <a:graphicData uri="http://schemas.openxmlformats.org/drawingml/2006/table">
+            <a:tbl>
+              <a:tblPr firstRow="1" bandRow="1">
+                <a:tableStyleId>{5C22544A-7EE6-4342-B048-85BDC9FD1C3A}</a:tableStyleId>
+              </a:tblPr>
+              <a:tblGrid>
+                <a:gridCol w="5456000"/>
+                <a:gridCol w="5456000"/>
+              </a:tblGrid>
+              <a:tr h="600000">
+                <a:tc>
+                  <a:txBody>
+                    <a:bodyPr/>
+                    <a:lstStyle/>
+                    <a:p>
+                      <a:r>
+                        <a:rPr sz="2000" b="1">
+                          <a:solidFill>
+                            <a:srgbClr val="FBF7EF"/>
+                          </a:solidFill>
+                          <a:latin typeface="Fredoka"/>
+                        </a:rPr>
+                        <a:t>Elemento</a:t>
+                      </a:r>
+                    </a:p>
+                  </a:txBody>
+                  <a:tcPr>
+                    <a:solidFill>
+                      <a:srgbClr val="1F2A44"/>
+                    </a:solidFill>
+                  </a:tcPr>
+                </a:tc>
+                <a:tc>
+                  <a:txBody>
+                    <a:bodyPr/>
+                    <a:lstStyle/>
+                    <a:p>
+                      <a:r>
+                        <a:rPr sz="2000" b="1">
+                          <a:solidFill>
+                            <a:srgbClr val="FBF7EF"/>
+                          </a:solidFill>
+                          <a:latin typeface="Fredoka"/>
+                        </a:rPr>
+                        <a:t>Ejemplo cerca de ti</a:t>
+                      </a:r>
+                    </a:p>
+                  </a:txBody>
+                  <a:tcPr>
+                    <a:solidFill>
+                      <a:srgbClr val="1F2A44"/>
+                    </a:solidFill>
+                  </a:tcPr>
+                </a:tc>
+              </a:tr>
+              <a:tr h="600000">
+                <a:tc>
+                  <a:txBody>
+                    <a:bodyPr/>
+                    <a:lstStyle/>
+                    <a:p>
+                      <a:r>
+                        <a:rPr sz="2000" b="1">
+                          <a:solidFill>
+                            <a:srgbClr val="1F2A44"/>
+                          </a:solidFill>
+                          <a:latin typeface="Nunito Sans"/>
+                        </a:rPr>
+                        <a:t>Costumbres</a:t>
+                      </a:r>
+                      <a:r>
+                        <a:rPr sz="2000" b="0">
+                          <a:solidFill>
+                            <a:srgbClr val="1F2A44"/>
+                          </a:solidFill>
+                          <a:latin typeface="Nunito Sans"/>
+                        </a:rPr>
+                        <a:t> y hábitos</a:t>
+                      </a:r>
+                    </a:p>
+                  </a:txBody>
+                  <a:tcPr>
+                    <a:solidFill>
+                      <a:srgbClr val="FFFFFF"/>
+                    </a:solidFill>
+                  </a:tcPr>
+                </a:tc>
+                <a:tc>
+                  <a:txBody>
+                    <a:bodyPr/>
+                    <a:lstStyle/>
+                    <a:p>
+                      <a:r>
+                        <a:rPr sz="2000" b="0">
+                          <a:solidFill>
+                            <a:srgbClr val="1F2A44"/>
+                          </a:solidFill>
+                          <a:latin typeface="Nunito Sans"/>
+                        </a:rPr>
+                        <a:t>Horarios de comida, fiestas como Aste Nagusia</a:t>
+                      </a:r>
+                    </a:p>
+                  </a:txBody>
+                  <a:tcPr>
+                    <a:solidFill>
+                      <a:srgbClr val="FFFFFF"/>
+                    </a:solidFill>
+                  </a:tcPr>
+                </a:tc>
+              </a:tr>
+              <a:tr h="600000">
+                <a:tc>
+                  <a:txBody>
+                    <a:bodyPr/>
+                    <a:lstStyle/>
+                    <a:p>
+                      <a:r>
+                        <a:rPr sz="2000" b="1">
+                          <a:solidFill>
+                            <a:srgbClr val="1F2A44"/>
+                          </a:solidFill>
+                          <a:latin typeface="Nunito Sans"/>
+                        </a:rPr>
+                        <a:t>Creencias</a:t>
+                      </a:r>
+                      <a:r>
+                        <a:rPr sz="2000" b="0">
+                          <a:solidFill>
+                            <a:srgbClr val="1F2A44"/>
+                          </a:solidFill>
+                          <a:latin typeface="Nunito Sans"/>
+                        </a:rPr>
+                        <a:t> y valores</a:t>
+                      </a:r>
+                    </a:p>
+                  </a:txBody>
+                  <a:tcPr>
+                    <a:solidFill>
+                      <a:srgbClr val="EAF0F7"/>
+                    </a:solidFill>
+                  </a:tcPr>
+                </a:tc>
+                <a:tc>
+                  <a:txBody>
+                    <a:bodyPr/>
+                    <a:lstStyle/>
+                    <a:p>
+                      <a:r>
+                        <a:rPr sz="2000" b="0">
+                          <a:solidFill>
+                            <a:srgbClr val="1F2A44"/>
+                          </a:solidFill>
+                          <a:latin typeface="Nunito Sans"/>
+                        </a:rPr>
+                        <a:t>Lo que se considera importante, religiones</a:t>
+                      </a:r>
+                    </a:p>
+                  </a:txBody>
+                  <a:tcPr>
+                    <a:solidFill>
+                      <a:srgbClr val="EAF0F7"/>
+                    </a:solidFill>
+                  </a:tcPr>
+                </a:tc>
+              </a:tr>
+              <a:tr h="600000">
+                <a:tc>
+                  <a:txBody>
+                    <a:bodyPr/>
+                    <a:lstStyle/>
+                    <a:p>
+                      <a:r>
+                        <a:rPr sz="2000" b="1">
+                          <a:solidFill>
+                            <a:srgbClr val="1F2A44"/>
+                          </a:solidFill>
+                          <a:latin typeface="Nunito Sans"/>
+                        </a:rPr>
+                        <a:t>Lengua</a:t>
+                      </a:r>
+                      <a:r>
+                        <a:rPr sz="2000" b="0">
+                          <a:solidFill>
+                            <a:srgbClr val="1F2A44"/>
+                          </a:solidFill>
+                          <a:latin typeface="Nunito Sans"/>
+                        </a:rPr>
+                        <a:t> y arte</a:t>
+                      </a:r>
+                    </a:p>
+                  </a:txBody>
+                  <a:tcPr>
+                    <a:solidFill>
+                      <a:srgbClr val="FFFFFF"/>
+                    </a:solidFill>
+                  </a:tcPr>
+                </a:tc>
+                <a:tc>
+                  <a:txBody>
+                    <a:bodyPr/>
+                    <a:lstStyle/>
+                    <a:p>
+                      <a:r>
+                        <a:rPr sz="2000" b="0">
+                          <a:solidFill>
+                            <a:srgbClr val="1F2A44"/>
+                          </a:solidFill>
+                          <a:latin typeface="Nunito Sans"/>
+                        </a:rPr>
+                        <a:t>Euskera, castellano, bertsos, canciones</a:t>
+                      </a:r>
+                    </a:p>
+                  </a:txBody>
+                  <a:tcPr>
+                    <a:solidFill>
+                      <a:srgbClr val="FFFFFF"/>
+                    </a:solidFill>
+                  </a:tcPr>
+                </a:tc>
+              </a:tr>
+              <a:tr h="600000">
+                <a:tc>
+                  <a:txBody>
+                    <a:bodyPr/>
+                    <a:lstStyle/>
+                    <a:p>
+                      <a:r>
+                        <a:rPr sz="2000" b="1">
+                          <a:solidFill>
+                            <a:srgbClr val="1F2A44"/>
+                          </a:solidFill>
+                          <a:latin typeface="Nunito Sans"/>
+                        </a:rPr>
+                        <a:t>Objetos</a:t>
+                      </a:r>
+                      <a:r>
+                        <a:rPr sz="2000" b="0">
+                          <a:solidFill>
+                            <a:srgbClr val="1F2A44"/>
+                          </a:solidFill>
+                          <a:latin typeface="Nunito Sans"/>
+                        </a:rPr>
+                        <a:t> y formas de relacionarse</a:t>
+                      </a:r>
+                    </a:p>
+                  </a:txBody>
+                  <a:tcPr>
+                    <a:solidFill>
+                      <a:srgbClr val="EAF0F7"/>
+                    </a:solidFill>
+                  </a:tcPr>
+                </a:tc>
+                <a:tc>
+                  <a:txBody>
+                    <a:bodyPr/>
+                    <a:lstStyle/>
+                    <a:p>
+                      <a:r>
+                        <a:rPr sz="2000" b="0">
+                          <a:solidFill>
+                            <a:srgbClr val="1F2A44"/>
+                          </a:solidFill>
+                          <a:latin typeface="Nunito Sans"/>
+                        </a:rPr>
+                        <a:t>La txapela; dar uno o dos besos al saludar</a:t>
+                      </a:r>
+                    </a:p>
+                  </a:txBody>
+                  <a:tcPr>
+                    <a:solidFill>
+                      <a:srgbClr val="EAF0F7"/>
+                    </a:solidFill>
+                  </a:tcPr>
+                </a:tc>
+              </a:tr>
+            </a:tbl>
+          </a:graphicData>
+        </a:graphic>
+      </p:graphicFrame>
     </p:spTree>
   </p:cSld>
   <p:clrMapOvr>
@@ -7468,7 +7661,7 @@
                 </a:solidFill>
                 <a:latin typeface="Nunito Sans"/>
               </a:rPr>
-              <a:t>BLOQUE 1 · DOS PALABRAS DISTINTAS</a:t>
+              <a:t>BLOQUE 1 · QUÉ ES UNA CULTURA</a:t>
             </a:r>
           </a:p>
         </p:txBody>
@@ -7507,7 +7700,7 @@
                 </a:solidFill>
                 <a:latin typeface="Fredoka"/>
               </a:rPr>
-              <a:t>¿Sexo o género?</a:t>
+              <a:t>Tres posturas ante la diversidad cultural</a:t>
             </a:r>
           </a:p>
         </p:txBody>
@@ -7531,8 +7724,9 @@
                 <a:tableStyleId>{5C22544A-7EE6-4342-B048-85BDC9FD1C3A}</a:tableStyleId>
               </a:tblPr>
               <a:tblGrid>
-                <a:gridCol w="5456000"/>
-                <a:gridCol w="5456000"/>
+                <a:gridCol w="3637333"/>
+                <a:gridCol w="3637333"/>
+                <a:gridCol w="3637334"/>
               </a:tblGrid>
               <a:tr h="600000">
                 <a:tc>
@@ -7547,7 +7741,7 @@
                           </a:solidFill>
                           <a:latin typeface="Fredoka"/>
                         </a:rPr>
-                        <a:t>Frase</a:t>
+                        <a:t>Postura</a:t>
                       </a:r>
                     </a:p>
                   </a:txBody>
@@ -7569,7 +7763,29 @@
                           </a:solidFill>
                           <a:latin typeface="Fredoka"/>
                         </a:rPr>
-                        <a:t>¿De qué habla?</a:t>
+                        <a:t>Qué dice</a:t>
+                      </a:r>
+                    </a:p>
+                  </a:txBody>
+                  <a:tcPr>
+                    <a:solidFill>
+                      <a:srgbClr val="1F2A44"/>
+                    </a:solidFill>
+                  </a:tcPr>
+                </a:tc>
+                <a:tc>
+                  <a:txBody>
+                    <a:bodyPr/>
+                    <a:lstStyle/>
+                    <a:p>
+                      <a:r>
+                        <a:rPr sz="2000" b="1">
+                          <a:solidFill>
+                            <a:srgbClr val="FBF7EF"/>
+                          </a:solidFill>
+                          <a:latin typeface="Fredoka"/>
+                        </a:rPr>
+                        <a:t>Problema o límite</a:t>
                       </a:r>
                     </a:p>
                   </a:txBody>
@@ -7587,13 +7803,13 @@
                     <a:lstStyle/>
                     <a:p>
                       <a:r>
-                        <a:rPr sz="2000" b="0">
+                        <a:rPr sz="2000" b="1">
                           <a:solidFill>
                             <a:srgbClr val="1F2A44"/>
                           </a:solidFill>
                           <a:latin typeface="Nunito Sans"/>
                         </a:rPr>
-                        <a:t>«Su voz cambió en la pubertad»</a:t>
+                        <a:t>Etnocentrismo</a:t>
                       </a:r>
                     </a:p>
                   </a:txBody>
@@ -7609,14 +7825,27 @@
                     <a:lstStyle/>
                     <a:p>
                       <a:r>
-                        <a:rPr sz="2000" b="1">
+                        <a:rPr sz="2000" b="0">
                           <a:solidFill>
                             <a:srgbClr val="1F2A44"/>
                           </a:solidFill>
                           <a:latin typeface="Nunito Sans"/>
                         </a:rPr>
-                        <a:t>Sexo</a:t>
+                        <a:t>Mi cultura es la medida de todas</a:t>
                       </a:r>
+                    </a:p>
+                  </a:txBody>
+                  <a:tcPr>
+                    <a:solidFill>
+                      <a:srgbClr val="FFFFFF"/>
+                    </a:solidFill>
+                  </a:tcPr>
+                </a:tc>
+                <a:tc>
+                  <a:txBody>
+                    <a:bodyPr/>
+                    <a:lstStyle/>
+                    <a:p>
                       <a:r>
                         <a:rPr sz="2000" b="0">
                           <a:solidFill>
@@ -7624,7 +7853,7 @@
                           </a:solidFill>
                           <a:latin typeface="Nunito Sans"/>
                         </a:rPr>
-                        <a:t>: el cuerpo y las hormonas</a:t>
+                        <a:t>Llama «raro» o «malo» a lo que solo es distinto</a:t>
                       </a:r>
                     </a:p>
                   </a:txBody>
@@ -7642,13 +7871,13 @@
                     <a:lstStyle/>
                     <a:p>
                       <a:r>
-                        <a:rPr sz="2000" b="0">
+                        <a:rPr sz="2000" b="1">
                           <a:solidFill>
                             <a:srgbClr val="1F2A44"/>
                           </a:solidFill>
                           <a:latin typeface="Nunito Sans"/>
                         </a:rPr>
-                        <a:t>«Las chicas tienen que ser discretas»</a:t>
+                        <a:t>Relativismo cultural</a:t>
                       </a:r>
                     </a:p>
                   </a:txBody>
@@ -7664,14 +7893,27 @@
                     <a:lstStyle/>
                     <a:p>
                       <a:r>
-                        <a:rPr sz="2000" b="1">
+                        <a:rPr sz="2000" b="0">
                           <a:solidFill>
                             <a:srgbClr val="1F2A44"/>
                           </a:solidFill>
                           <a:latin typeface="Nunito Sans"/>
                         </a:rPr>
-                        <a:t>Género</a:t>
+                        <a:t>Cada costumbre se entiende dentro de su cultura</a:t>
                       </a:r>
+                    </a:p>
+                  </a:txBody>
+                  <a:tcPr>
+                    <a:solidFill>
+                      <a:srgbClr val="EAF0F7"/>
+                    </a:solidFill>
+                  </a:tcPr>
+                </a:tc>
+                <a:tc>
+                  <a:txBody>
+                    <a:bodyPr/>
+                    <a:lstStyle/>
+                    <a:p>
                       <a:r>
                         <a:rPr sz="2000" b="0">
                           <a:solidFill>
@@ -7679,7 +7921,7 @@
                           </a:solidFill>
                           <a:latin typeface="Nunito Sans"/>
                         </a:rPr>
-                        <a:t>: una expectativa social</a:t>
+                        <a:t>Llevado al extremo, no se podría criticar nada</a:t>
                       </a:r>
                     </a:p>
                   </a:txBody>
@@ -7697,13 +7939,13 @@
                     <a:lstStyle/>
                     <a:p>
                       <a:r>
-                        <a:rPr sz="2000" b="0">
+                        <a:rPr sz="2000" b="1">
                           <a:solidFill>
                             <a:srgbClr val="1F2A44"/>
                           </a:solidFill>
                           <a:latin typeface="Nunito Sans"/>
                         </a:rPr>
-                        <a:t>«Los hombres no friegan»</a:t>
+                        <a:t>Interculturalidad</a:t>
                       </a:r>
                     </a:p>
                   </a:txBody>
@@ -7719,14 +7961,27 @@
                     <a:lstStyle/>
                     <a:p>
                       <a:r>
-                        <a:rPr sz="2000" b="1">
+                        <a:rPr sz="2000" b="0">
                           <a:solidFill>
                             <a:srgbClr val="1F2A44"/>
                           </a:solidFill>
                           <a:latin typeface="Nunito Sans"/>
                         </a:rPr>
-                        <a:t>Género</a:t>
+                        <a:t>Respeto, diálogo y derechos humanos para todos</a:t>
                       </a:r>
+                    </a:p>
+                  </a:txBody>
+                  <a:tcPr>
+                    <a:solidFill>
+                      <a:srgbClr val="FFFFFF"/>
+                    </a:solidFill>
+                  </a:tcPr>
+                </a:tc>
+                <a:tc>
+                  <a:txBody>
+                    <a:bodyPr/>
+                    <a:lstStyle/>
+                    <a:p>
                       <a:r>
                         <a:rPr sz="2000" b="0">
                           <a:solidFill>
@@ -7734,7 +7989,7 @@
                           </a:solidFill>
                           <a:latin typeface="Nunito Sans"/>
                         </a:rPr>
-                        <a:t>: un rol que se ha enseñado</a:t>
+                        <a:t>Exige esfuerzo: conocer al otro y dar razones</a:t>
                       </a:r>
                     </a:p>
                   </a:txBody>
@@ -7763,7 +8018,7 @@
     <p:bg>
       <p:bgPr>
         <a:solidFill>
-          <a:srgbClr val="FBF7EF"/>
+          <a:srgbClr val="1F2A44"/>
         </a:solidFill>
         <a:effectLst/>
       </p:bgPr>
@@ -7783,8 +8038,8 @@
         </p:nvSpPr>
         <p:spPr>
           <a:xfrm>
-            <a:off x="640000" y="380000"/>
-            <a:ext cx="10912000" cy="420000"/>
+            <a:off x="640000" y="2300000"/>
+            <a:ext cx="10912000" cy="500000"/>
           </a:xfrm>
           <a:prstGeom prst="rect">
             <a:avLst/>
@@ -7799,17 +8054,17 @@
           <a:p>
             <a:pPr>
               <a:spcAft>
-                <a:spcPts val="630"/>
+                <a:spcPts val="810"/>
               </a:spcAft>
             </a:pPr>
             <a:r>
-              <a:rPr sz="1400" b="1">
-                <a:solidFill>
-                  <a:srgbClr val="E8793A"/>
-                </a:solidFill>
-                <a:latin typeface="Nunito Sans"/>
-              </a:rPr>
-              <a:t>BLOQUE 1 · DOS PALABRAS DISTINTAS</a:t>
+              <a:rPr sz="1800" b="1">
+                <a:solidFill>
+                  <a:srgbClr val="F4B183"/>
+                </a:solidFill>
+                <a:latin typeface="Nunito Sans"/>
+              </a:rPr>
+              <a:t>BLOQUE 2</a:t>
             </a:r>
           </a:p>
         </p:txBody>
@@ -7822,7 +8077,7 @@
         </p:nvSpPr>
         <p:spPr>
           <a:xfrm>
-            <a:off x="640000" y="760000"/>
+            <a:off x="640000" y="2800000"/>
             <a:ext cx="10912000" cy="800000"/>
           </a:xfrm>
           <a:prstGeom prst="rect">
@@ -7838,203 +8093,17 @@
           <a:p>
             <a:pPr>
               <a:spcAft>
-                <a:spcPts val="1710"/>
+                <a:spcPts val="2160"/>
               </a:spcAft>
             </a:pPr>
             <a:r>
-              <a:rPr sz="3800" b="1">
-                <a:solidFill>
-                  <a:srgbClr val="1F2A44"/>
+              <a:rPr sz="4800" b="1">
+                <a:solidFill>
+                  <a:srgbClr val="FBF7EF"/>
                 </a:solidFill>
                 <a:latin typeface="Fredoka"/>
               </a:rPr>
-              <a:t>Los roles cambian con las épocas y los lugares</a:t>
-            </a:r>
-          </a:p>
-        </p:txBody>
-      </p:sp>
-      <p:sp>
-        <p:nvSpPr>
-          <p:cNvPr id="4" name="TextBox 3"/>
-          <p:cNvSpPr txBox="1"/>
-          <p:nvPr/>
-        </p:nvSpPr>
-        <p:spPr>
-          <a:xfrm>
-            <a:off x="640000" y="1650000"/>
-            <a:ext cx="10912000" cy="4808000"/>
-          </a:xfrm>
-          <a:prstGeom prst="rect">
-            <a:avLst/>
-          </a:prstGeom>
-          <a:noFill/>
-        </p:spPr>
-        <p:txBody>
-          <a:bodyPr wrap="square">
-            <a:spAutoFit/>
-          </a:bodyPr>
-          <a:lstStyle/>
-          <a:p>
-            <a:pPr>
-              <a:spcAft>
-                <a:spcPts val="1260"/>
-              </a:spcAft>
-            </a:pPr>
-            <a:r>
-              <a:rPr sz="2800" b="1">
-                <a:solidFill>
-                  <a:srgbClr val="E8793A"/>
-                </a:solidFill>
-                <a:latin typeface="Nunito Sans"/>
-              </a:rPr>
-              <a:t>• </a:t>
-            </a:r>
-            <a:r>
-              <a:rPr sz="2800" b="0">
-                <a:solidFill>
-                  <a:srgbClr val="1F2A44"/>
-                </a:solidFill>
-                <a:latin typeface="Nunito Sans"/>
-              </a:rPr>
-              <a:t>En el siglo XVII, los </a:t>
-            </a:r>
-            <a:r>
-              <a:rPr sz="2800" b="1">
-                <a:solidFill>
-                  <a:srgbClr val="1F2A44"/>
-                </a:solidFill>
-                <a:latin typeface="Nunito Sans"/>
-              </a:rPr>
-              <a:t>tacones</a:t>
-            </a:r>
-            <a:r>
-              <a:rPr sz="2800" b="0">
-                <a:solidFill>
-                  <a:srgbClr val="1F2A44"/>
-                </a:solidFill>
-                <a:latin typeface="Nunito Sans"/>
-              </a:rPr>
-              <a:t> eran moda de hombres nobles en Europa</a:t>
-            </a:r>
-          </a:p>
-          <a:p>
-            <a:pPr>
-              <a:spcAft>
-                <a:spcPts val="1260"/>
-              </a:spcAft>
-            </a:pPr>
-            <a:r>
-              <a:rPr sz="2800" b="1">
-                <a:solidFill>
-                  <a:srgbClr val="E8793A"/>
-                </a:solidFill>
-                <a:latin typeface="Nunito Sans"/>
-              </a:rPr>
-              <a:t>• </a:t>
-            </a:r>
-            <a:r>
-              <a:rPr sz="2800" b="1">
-                <a:solidFill>
-                  <a:srgbClr val="1F2A44"/>
-                </a:solidFill>
-                <a:latin typeface="Nunito Sans"/>
-              </a:rPr>
-              <a:t>Rosa para niñas</a:t>
-            </a:r>
-            <a:r>
-              <a:rPr sz="2800" b="0">
-                <a:solidFill>
-                  <a:srgbClr val="1F2A44"/>
-                </a:solidFill>
-                <a:latin typeface="Nunito Sans"/>
-              </a:rPr>
-              <a:t> y azul para niños: se extendió en el siglo XX</a:t>
-            </a:r>
-          </a:p>
-          <a:p>
-            <a:pPr>
-              <a:spcAft>
-                <a:spcPts val="1260"/>
-              </a:spcAft>
-            </a:pPr>
-            <a:r>
-              <a:rPr sz="2800" b="1">
-                <a:solidFill>
-                  <a:srgbClr val="E8793A"/>
-                </a:solidFill>
-                <a:latin typeface="Nunito Sans"/>
-              </a:rPr>
-              <a:t>• </a:t>
-            </a:r>
-            <a:r>
-              <a:rPr sz="2800" b="0">
-                <a:solidFill>
-                  <a:srgbClr val="1F2A44"/>
-                </a:solidFill>
-                <a:latin typeface="Nunito Sans"/>
-              </a:rPr>
-              <a:t>En Escocia, muchos hombres llevan </a:t>
-            </a:r>
-            <a:r>
-              <a:rPr sz="2800" b="1">
-                <a:solidFill>
-                  <a:srgbClr val="1F2A44"/>
-                </a:solidFill>
-                <a:latin typeface="Nunito Sans"/>
-              </a:rPr>
-              <a:t>falda</a:t>
-            </a:r>
-            <a:r>
-              <a:rPr sz="2800" b="0">
-                <a:solidFill>
-                  <a:srgbClr val="1F2A44"/>
-                </a:solidFill>
-                <a:latin typeface="Nunito Sans"/>
-              </a:rPr>
-              <a:t> (el kilt) en las fiestas</a:t>
-            </a:r>
-          </a:p>
-          <a:p>
-            <a:pPr>
-              <a:spcAft>
-                <a:spcPts val="1260"/>
-              </a:spcAft>
-            </a:pPr>
-            <a:r>
-              <a:rPr sz="2800" b="1">
-                <a:solidFill>
-                  <a:srgbClr val="E8793A"/>
-                </a:solidFill>
-                <a:latin typeface="Nunito Sans"/>
-              </a:rPr>
-              <a:t>• </a:t>
-            </a:r>
-            <a:r>
-              <a:rPr sz="2800" b="0">
-                <a:solidFill>
-                  <a:srgbClr val="1F2A44"/>
-                </a:solidFill>
-                <a:latin typeface="Nunito Sans"/>
-              </a:rPr>
-              <a:t>En España, hasta 1975, una mujer casada necesitaba </a:t>
-            </a:r>
-            <a:r>
-              <a:rPr sz="2800" b="1">
-                <a:solidFill>
-                  <a:srgbClr val="1F2A44"/>
-                </a:solidFill>
-                <a:latin typeface="Nunito Sans"/>
-              </a:rPr>
-              <a:t>permiso del marido</a:t>
-            </a:r>
-            <a:r>
-              <a:rPr sz="2800" b="0">
-                <a:solidFill>
-                  <a:srgbClr val="1F2A44"/>
-                </a:solidFill>
-                <a:latin typeface="Nunito Sans"/>
-              </a:rPr>
-              <a:t> para trabajar</a:t>
+              <a:t>Casos resueltos</a:t>
             </a:r>
           </a:p>
         </p:txBody>
